--- a/OneMember-Merchant-Presentation-TH.pptx
+++ b/OneMember-Merchant-Presentation-TH.pptx
@@ -4,22 +4,25 @@
   <p:sldMasterIdLst>
     <p:sldMasterId id="2147483648" r:id="rId1"/>
   </p:sldMasterIdLst>
+  <p:notesMasterIdLst>
+    <p:notesMasterId r:id="rId15"/>
+  </p:notesMasterIdLst>
   <p:sldIdLst>
-    <p:sldId id="256" r:id="rId7"/>
-    <p:sldId id="257" r:id="rId9"/>
-    <p:sldId id="258" r:id="rId10"/>
-    <p:sldId id="259" r:id="rId11"/>
-    <p:sldId id="260" r:id="rId12"/>
-    <p:sldId id="261" r:id="rId13"/>
-    <p:sldId id="262" r:id="rId14"/>
-    <p:sldId id="263" r:id="rId15"/>
-    <p:sldId id="264" r:id="rId16"/>
-    <p:sldId id="265" r:id="rId17"/>
-    <p:sldId id="266" r:id="rId18"/>
-    <p:sldId id="267" r:id="rId19"/>
-    <p:sldId id="268" r:id="rId20"/>
+    <p:sldId id="256" r:id="rId2"/>
+    <p:sldId id="257" r:id="rId3"/>
+    <p:sldId id="258" r:id="rId4"/>
+    <p:sldId id="259" r:id="rId5"/>
+    <p:sldId id="260" r:id="rId6"/>
+    <p:sldId id="261" r:id="rId7"/>
+    <p:sldId id="262" r:id="rId8"/>
+    <p:sldId id="263" r:id="rId9"/>
+    <p:sldId id="264" r:id="rId10"/>
+    <p:sldId id="265" r:id="rId11"/>
+    <p:sldId id="266" r:id="rId12"/>
+    <p:sldId id="267" r:id="rId13"/>
+    <p:sldId id="268" r:id="rId14"/>
   </p:sldIdLst>
-  <p:sldSz cx="12191695" cy="6858000" type="screen4x3"/>
+  <p:sldSz cx="12192000" cy="6858000"/>
   <p:notesSz cx="6858000" cy="9144000"/>
   <p:defaultTextStyle>
     <a:defPPr>
@@ -116,11 +119,27 @@
       </a:defRPr>
     </a:lvl9pPr>
   </p:defaultTextStyle>
+  <p:extLst>
+    <p:ext uri="{EFAFB233-063F-42B5-8137-9DF3F51BA10A}">
+      <p15:sldGuideLst xmlns:p15="http://schemas.microsoft.com/office/powerpoint/2012/main">
+        <p15:guide id="1" orient="horz" pos="2160">
+          <p15:clr>
+            <a:srgbClr val="A4A3A4"/>
+          </p15:clr>
+        </p15:guide>
+        <p15:guide id="2" pos="2880">
+          <p15:clr>
+            <a:srgbClr val="A4A3A4"/>
+          </p15:clr>
+        </p15:guide>
+      </p15:sldGuideLst>
+    </p:ext>
+  </p:extLst>
 </p:presentation>
 </file>
 
 <file path=ppt/notesMasters/notesMaster1.xml><?xml version="1.0" encoding="utf-8"?>
-<p:notesMaster xmlns:a="http://schemas.openxmlformats.org/drawingml/2006/main" xmlns:p="http://schemas.openxmlformats.org/presentationml/2006/main" xmlns:r="http://schemas.openxmlformats.org/officeDocument/2006/relationships">
+<p:notesMaster xmlns:a="http://schemas.openxmlformats.org/drawingml/2006/main" xmlns:r="http://schemas.openxmlformats.org/officeDocument/2006/relationships" xmlns:p="http://schemas.openxmlformats.org/presentationml/2006/main">
   <p:cSld>
     <p:bg>
       <p:bgRef idx="1001">
@@ -141,241 +160,16 @@
           <a:chExt cx="0" cy="0"/>
         </a:xfrm>
       </p:grpSpPr>
-      <p:sp>
-        <p:nvSpPr>
-          <p:cNvPr id="2" name="Header Placeholder 1"/>
-          <p:cNvSpPr>
-            <a:spLocks noGrp="1"/>
-          </p:cNvSpPr>
-          <p:nvPr>
-            <p:ph type="hdr" sz="quarter"/>
-          </p:nvPr>
-        </p:nvSpPr>
-        <p:spPr>
-          <a:xfrm>
-            <a:off x="0" y="0"/>
-            <a:ext cx="2971800" cy="457200"/>
-          </a:xfrm>
-          <a:prstGeom prst="rect">
-            <a:avLst/>
-          </a:prstGeom>
-        </p:spPr>
-        <p:txBody>
-          <a:bodyPr vert="horz" lIns="91440" tIns="45720" rIns="91440" bIns="45720" rtlCol="0"/>
-          <a:lstStyle>
-            <a:lvl1pPr algn="l">
-              <a:defRPr sz="1200"/>
-            </a:lvl1pPr>
-          </a:lstStyle>
-          <a:p>
-            <a:endParaRPr lang="en-US"/>
-          </a:p>
-        </p:txBody>
-      </p:sp>
-      <p:sp>
-        <p:nvSpPr>
-          <p:cNvPr id="3" name="Date Placeholder 2"/>
-          <p:cNvSpPr>
-            <a:spLocks noGrp="1"/>
-          </p:cNvSpPr>
-          <p:nvPr>
-            <p:ph type="dt" idx="1"/>
-          </p:nvPr>
-        </p:nvSpPr>
-        <p:spPr>
-          <a:xfrm>
-            <a:off x="3884613" y="0"/>
-            <a:ext cx="2971800" cy="457200"/>
-          </a:xfrm>
-          <a:prstGeom prst="rect">
-            <a:avLst/>
-          </a:prstGeom>
-        </p:spPr>
-        <p:txBody>
-          <a:bodyPr vert="horz" lIns="91440" tIns="45720" rIns="91440" bIns="45720" rtlCol="0"/>
-          <a:lstStyle>
-            <a:lvl1pPr algn="r">
-              <a:defRPr sz="1200"/>
-            </a:lvl1pPr>
-          </a:lstStyle>
-          <a:p>
-            <a:fld id="{0F89C1C7-3DCD-1040-A9CF-14679D8B5DDD}" type="datetimeFigureOut">
-              <a:rPr lang="en-US" smtClean="0"/>
-              <a:t>10/17/16</a:t>
-            </a:fld>
-            <a:endParaRPr lang="en-US"/>
-          </a:p>
-        </p:txBody>
-      </p:sp>
-      <p:sp>
-        <p:nvSpPr>
-          <p:cNvPr id="4" name="Slide Image Placeholder 3"/>
-          <p:cNvSpPr>
-            <a:spLocks noGrp="1" noRot="1" noChangeAspect="1"/>
-          </p:cNvSpPr>
-          <p:nvPr>
-            <p:ph type="sldImg" idx="2"/>
-          </p:nvPr>
-        </p:nvSpPr>
-        <p:spPr>
-          <a:xfrm>
-            <a:off x="1143000" y="685800"/>
-            <a:ext cx="4572000" cy="3429000"/>
-          </a:xfrm>
-          <a:prstGeom prst="rect">
-            <a:avLst/>
-          </a:prstGeom>
-          <a:noFill/>
-          <a:ln w="12700">
-            <a:solidFill>
-              <a:prstClr val="black"/>
-            </a:solidFill>
-          </a:ln>
-        </p:spPr>
-        <p:txBody>
-          <a:bodyPr vert="horz" lIns="91440" tIns="45720" rIns="91440" bIns="45720" rtlCol="0" anchor="ctr"/>
-          <a:lstStyle/>
-          <a:p>
-            <a:endParaRPr lang="en-US"/>
-          </a:p>
-        </p:txBody>
-      </p:sp>
-      <p:sp>
-        <p:nvSpPr>
-          <p:cNvPr id="5" name="Notes Placeholder 4"/>
-          <p:cNvSpPr>
-            <a:spLocks noGrp="1"/>
-          </p:cNvSpPr>
-          <p:nvPr>
-            <p:ph type="body" sz="quarter" idx="3"/>
-          </p:nvPr>
-        </p:nvSpPr>
-        <p:spPr>
-          <a:xfrm>
-            <a:off x="685800" y="4343400"/>
-            <a:ext cx="5486400" cy="4114800"/>
-          </a:xfrm>
-          <a:prstGeom prst="rect">
-            <a:avLst/>
-          </a:prstGeom>
-        </p:spPr>
-        <p:txBody>
-          <a:bodyPr vert="horz" lIns="91440" tIns="45720" rIns="91440" bIns="45720" rtlCol="0"/>
-          <a:lstStyle/>
-          <a:p>
-            <a:pPr lvl="0"/>
-            <a:r>
-              <a:rPr lang="en-US" smtClean="0"/>
-              <a:t>Click to edit Master text styles</a:t>
-            </a:r>
-          </a:p>
-          <a:p>
-            <a:pPr lvl="1"/>
-            <a:r>
-              <a:rPr lang="en-US" smtClean="0"/>
-              <a:t>Second level</a:t>
-            </a:r>
-          </a:p>
-          <a:p>
-            <a:pPr lvl="2"/>
-            <a:r>
-              <a:rPr lang="en-US" smtClean="0"/>
-              <a:t>Third level</a:t>
-            </a:r>
-          </a:p>
-          <a:p>
-            <a:pPr lvl="3"/>
-            <a:r>
-              <a:rPr lang="en-US" smtClean="0"/>
-              <a:t>Fourth level</a:t>
-            </a:r>
-          </a:p>
-          <a:p>
-            <a:pPr lvl="4"/>
-            <a:r>
-              <a:rPr lang="en-US" smtClean="0"/>
-              <a:t>Fifth level</a:t>
-            </a:r>
-            <a:endParaRPr lang="en-US"/>
-          </a:p>
-        </p:txBody>
-      </p:sp>
-      <p:sp>
-        <p:nvSpPr>
-          <p:cNvPr id="6" name="Footer Placeholder 5"/>
-          <p:cNvSpPr>
-            <a:spLocks noGrp="1"/>
-          </p:cNvSpPr>
-          <p:nvPr>
-            <p:ph type="ftr" sz="quarter" idx="4"/>
-          </p:nvPr>
-        </p:nvSpPr>
-        <p:spPr>
-          <a:xfrm>
-            <a:off x="0" y="8685213"/>
-            <a:ext cx="2971800" cy="457200"/>
-          </a:xfrm>
-          <a:prstGeom prst="rect">
-            <a:avLst/>
-          </a:prstGeom>
-        </p:spPr>
-        <p:txBody>
-          <a:bodyPr vert="horz" lIns="91440" tIns="45720" rIns="91440" bIns="45720" rtlCol="0" anchor="b"/>
-          <a:lstStyle>
-            <a:lvl1pPr algn="l">
-              <a:defRPr sz="1200"/>
-            </a:lvl1pPr>
-          </a:lstStyle>
-          <a:p>
-            <a:endParaRPr lang="en-US"/>
-          </a:p>
-        </p:txBody>
-      </p:sp>
-      <p:sp>
-        <p:nvSpPr>
-          <p:cNvPr id="7" name="Slide Number Placeholder 6"/>
-          <p:cNvSpPr>
-            <a:spLocks noGrp="1"/>
-          </p:cNvSpPr>
-          <p:nvPr>
-            <p:ph type="sldNum" sz="quarter" idx="5"/>
-          </p:nvPr>
-        </p:nvSpPr>
-        <p:spPr>
-          <a:xfrm>
-            <a:off x="3884613" y="8685213"/>
-            <a:ext cx="2971800" cy="457200"/>
-          </a:xfrm>
-          <a:prstGeom prst="rect">
-            <a:avLst/>
-          </a:prstGeom>
-        </p:spPr>
-        <p:txBody>
-          <a:bodyPr vert="horz" lIns="91440" tIns="45720" rIns="91440" bIns="45720" rtlCol="0" anchor="b"/>
-          <a:lstStyle>
-            <a:lvl1pPr algn="r">
-              <a:defRPr sz="1200"/>
-            </a:lvl1pPr>
-          </a:lstStyle>
-          <a:p>
-            <a:fld id="{BB5E49A5-4136-284D-997B-48E1D791AD67}" type="slidenum">
-              <a:rPr lang="en-US" smtClean="0"/>
-              <a:t>‹#›</a:t>
-            </a:fld>
-            <a:endParaRPr lang="en-US"/>
-          </a:p>
-        </p:txBody>
-      </p:sp>
     </p:spTree>
     <p:extLst>
       <p:ext uri="{BB962C8B-B14F-4D97-AF65-F5344CB8AC3E}">
-        <p14:creationId xmlns:p14="http://schemas.microsoft.com/office/powerpoint/2010/main" val="2623252185"/>
+        <p14:creationId xmlns:p14="http://schemas.microsoft.com/office/powerpoint/2010/main" val="2192048423"/>
       </p:ext>
     </p:extLst>
   </p:cSld>
   <p:clrMap bg1="lt1" tx1="dk1" bg2="lt2" tx2="dk2" accent1="accent1" accent2="accent2" accent3="accent3" accent4="accent4" accent5="accent5" accent6="accent6" hlink="hlink" folHlink="folHlink"/>
   <p:notesStyle>
-    <a:lvl1pPr marL="0" algn="l" defTabSz="457200" rtl="0" eaLnBrk="1" latinLnBrk="0" hangingPunct="1">
+    <a:lvl1pPr marL="0" algn="l" defTabSz="914400" rtl="0" eaLnBrk="1" latinLnBrk="0" hangingPunct="1">
       <a:defRPr sz="1200" kern="1200">
         <a:solidFill>
           <a:schemeClr val="tx1"/>
@@ -385,7 +179,7 @@
         <a:cs typeface="+mn-cs"/>
       </a:defRPr>
     </a:lvl1pPr>
-    <a:lvl2pPr marL="457200" algn="l" defTabSz="457200" rtl="0" eaLnBrk="1" latinLnBrk="0" hangingPunct="1">
+    <a:lvl2pPr marL="457200" algn="l" defTabSz="914400" rtl="0" eaLnBrk="1" latinLnBrk="0" hangingPunct="1">
       <a:defRPr sz="1200" kern="1200">
         <a:solidFill>
           <a:schemeClr val="tx1"/>
@@ -395,7 +189,7 @@
         <a:cs typeface="+mn-cs"/>
       </a:defRPr>
     </a:lvl2pPr>
-    <a:lvl3pPr marL="914400" algn="l" defTabSz="457200" rtl="0" eaLnBrk="1" latinLnBrk="0" hangingPunct="1">
+    <a:lvl3pPr marL="914400" algn="l" defTabSz="914400" rtl="0" eaLnBrk="1" latinLnBrk="0" hangingPunct="1">
       <a:defRPr sz="1200" kern="1200">
         <a:solidFill>
           <a:schemeClr val="tx1"/>
@@ -405,7 +199,7 @@
         <a:cs typeface="+mn-cs"/>
       </a:defRPr>
     </a:lvl3pPr>
-    <a:lvl4pPr marL="1371600" algn="l" defTabSz="457200" rtl="0" eaLnBrk="1" latinLnBrk="0" hangingPunct="1">
+    <a:lvl4pPr marL="1371600" algn="l" defTabSz="914400" rtl="0" eaLnBrk="1" latinLnBrk="0" hangingPunct="1">
       <a:defRPr sz="1200" kern="1200">
         <a:solidFill>
           <a:schemeClr val="tx1"/>
@@ -415,7 +209,7 @@
         <a:cs typeface="+mn-cs"/>
       </a:defRPr>
     </a:lvl4pPr>
-    <a:lvl5pPr marL="1828800" algn="l" defTabSz="457200" rtl="0" eaLnBrk="1" latinLnBrk="0" hangingPunct="1">
+    <a:lvl5pPr marL="1828800" algn="l" defTabSz="914400" rtl="0" eaLnBrk="1" latinLnBrk="0" hangingPunct="1">
       <a:defRPr sz="1200" kern="1200">
         <a:solidFill>
           <a:schemeClr val="tx1"/>
@@ -425,7 +219,7 @@
         <a:cs typeface="+mn-cs"/>
       </a:defRPr>
     </a:lvl5pPr>
-    <a:lvl6pPr marL="2286000" algn="l" defTabSz="457200" rtl="0" eaLnBrk="1" latinLnBrk="0" hangingPunct="1">
+    <a:lvl6pPr marL="2286000" algn="l" defTabSz="914400" rtl="0" eaLnBrk="1" latinLnBrk="0" hangingPunct="1">
       <a:defRPr sz="1200" kern="1200">
         <a:solidFill>
           <a:schemeClr val="tx1"/>
@@ -435,7 +229,7 @@
         <a:cs typeface="+mn-cs"/>
       </a:defRPr>
     </a:lvl6pPr>
-    <a:lvl7pPr marL="2743200" algn="l" defTabSz="457200" rtl="0" eaLnBrk="1" latinLnBrk="0" hangingPunct="1">
+    <a:lvl7pPr marL="2743200" algn="l" defTabSz="914400" rtl="0" eaLnBrk="1" latinLnBrk="0" hangingPunct="1">
       <a:defRPr sz="1200" kern="1200">
         <a:solidFill>
           <a:schemeClr val="tx1"/>
@@ -445,7 +239,7 @@
         <a:cs typeface="+mn-cs"/>
       </a:defRPr>
     </a:lvl7pPr>
-    <a:lvl8pPr marL="3200400" algn="l" defTabSz="457200" rtl="0" eaLnBrk="1" latinLnBrk="0" hangingPunct="1">
+    <a:lvl8pPr marL="3200400" algn="l" defTabSz="914400" rtl="0" eaLnBrk="1" latinLnBrk="0" hangingPunct="1">
       <a:defRPr sz="1200" kern="1200">
         <a:solidFill>
           <a:schemeClr val="tx1"/>
@@ -455,7 +249,7 @@
         <a:cs typeface="+mn-cs"/>
       </a:defRPr>
     </a:lvl8pPr>
-    <a:lvl9pPr marL="3657600" algn="l" defTabSz="457200" rtl="0" eaLnBrk="1" latinLnBrk="0" hangingPunct="1">
+    <a:lvl9pPr marL="3657600" algn="l" defTabSz="914400" rtl="0" eaLnBrk="1" latinLnBrk="0" hangingPunct="1">
       <a:defRPr sz="1200" kern="1200">
         <a:solidFill>
           <a:schemeClr val="tx1"/>
@@ -470,7 +264,7 @@
 </file>
 
 <file path=ppt/notesSlides/notesSlide1.xml><?xml version="1.0" encoding="utf-8"?>
-<p:notes xmlns:a="http://schemas.openxmlformats.org/drawingml/2006/main" xmlns:p="http://schemas.openxmlformats.org/presentationml/2006/main" xmlns:r="http://schemas.openxmlformats.org/officeDocument/2006/relationships">
+<p:notes xmlns:a="http://schemas.openxmlformats.org/drawingml/2006/main" xmlns:r="http://schemas.openxmlformats.org/officeDocument/2006/relationships" xmlns:p="http://schemas.openxmlformats.org/presentationml/2006/main">
   <p:cSld>
     <p:spTree>
       <p:nvGrpSpPr>
@@ -490,7 +284,7 @@
         <p:nvSpPr>
           <p:cNvPr id="2" name="Slide Image Placeholder 1"/>
           <p:cNvSpPr>
-            <a:spLocks noGrp="1"/>
+            <a:spLocks noGrp="1" noRot="1" noChangeAspect="1"/>
           </p:cNvSpPr>
           <p:nvPr>
             <p:ph type="sldImg" idx="2"/>
@@ -505,7 +299,7 @@
             <a:spLocks noGrp="1"/>
           </p:cNvSpPr>
           <p:nvPr>
-            <p:ph type="body" idx="3" sz="quarter"/>
+            <p:ph type="body" sz="quarter" idx="3"/>
           </p:nvPr>
         </p:nvSpPr>
         <p:spPr/>
@@ -517,13 +311,17 @@
               <a:t>สไลด์ 1 — หน้าปก (เป้าหมาย: 1 นาที)</a:t>
             </a:r>
           </a:p>
-          <a:p/>
+          <a:p>
+            <a:endParaRPr/>
+          </a:p>
           <a:p>
             <a:r>
               <a:t>เปิดด้วย: "ขอบคุณที่สละเวลา 20 นาทีให้กับเราในวันนี้"</a:t>
             </a:r>
           </a:p>
-          <a:p/>
+          <a:p>
+            <a:endParaRPr/>
+          </a:p>
           <a:p>
             <a:r>
               <a:t>OneMember คือแพลตฟอร์มการเติบโตสำหรับผู้ประกอบการ — ไม่ใช่แค่แอปสะสมแต้ม</a:t>
@@ -534,7 +332,9 @@
               <a:t>เราให้เครื่องมือที่เคยมีเฉพาะในธุรกิจเชนขนาดใหญ่ แก่ธุรกิจท้องถิ่นทุกขนาด</a:t>
             </a:r>
           </a:p>
-          <a:p/>
+          <a:p>
+            <a:endParaRPr/>
+          </a:p>
           <a:p>
             <a:r>
               <a:t>ประเด็นหลัก:</a:t>
@@ -555,7 +355,9 @@
               <a:t>• ถามว่า: "ตอนนี้คุณมีระบบสมาชิกหรือสะสมแต้มอะไรบ้างไหม?"</a:t>
             </a:r>
           </a:p>
-          <a:p/>
+          <a:p>
+            <a:endParaRPr/>
+          </a:p>
         </p:txBody>
       </p:sp>
       <p:sp>
@@ -565,7 +367,7 @@
             <a:spLocks noGrp="1"/>
           </p:cNvSpPr>
           <p:nvPr>
-            <p:ph type="sldNum" idx="5" sz="quarter"/>
+            <p:ph type="sldNum" sz="quarter" idx="5"/>
           </p:nvPr>
         </p:nvSpPr>
         <p:spPr/>
@@ -579,7 +381,7 @@
 </file>
 
 <file path=ppt/notesSlides/notesSlide10.xml><?xml version="1.0" encoding="utf-8"?>
-<p:notes xmlns:a="http://schemas.openxmlformats.org/drawingml/2006/main" xmlns:p="http://schemas.openxmlformats.org/presentationml/2006/main" xmlns:r="http://schemas.openxmlformats.org/officeDocument/2006/relationships">
+<p:notes xmlns:a="http://schemas.openxmlformats.org/drawingml/2006/main" xmlns:r="http://schemas.openxmlformats.org/officeDocument/2006/relationships" xmlns:p="http://schemas.openxmlformats.org/presentationml/2006/main">
   <p:cSld>
     <p:spTree>
       <p:nvGrpSpPr>
@@ -599,7 +401,7 @@
         <p:nvSpPr>
           <p:cNvPr id="2" name="Slide Image Placeholder 1"/>
           <p:cNvSpPr>
-            <a:spLocks noGrp="1"/>
+            <a:spLocks noGrp="1" noRot="1" noChangeAspect="1"/>
           </p:cNvSpPr>
           <p:nvPr>
             <p:ph type="sldImg" idx="2"/>
@@ -614,7 +416,7 @@
             <a:spLocks noGrp="1"/>
           </p:cNvSpPr>
           <p:nvPr>
-            <p:ph type="body" idx="3" sz="quarter"/>
+            <p:ph type="body" sz="quarter" idx="3"/>
           </p:nvPr>
         </p:nvSpPr>
         <p:spPr/>
@@ -626,19 +428,25 @@
               <a:t>สไลด์ 10 — ข้อมูลเชิงลึก (เป้าหมาย: 1 นาที)</a:t>
             </a:r>
           </a:p>
-          <a:p/>
+          <a:p>
+            <a:endParaRPr/>
+          </a:p>
           <a:p>
             <a:r>
               <a:t>วางตำแหน่งเป็นสิ่งที่กำลังจะมา — Phase 2</a:t>
             </a:r>
           </a:p>
-          <a:p/>
+          <a:p>
+            <a:endParaRPr/>
+          </a:p>
           <a:p>
             <a:r>
               <a:t>"ตอนนี้คุณได้แดชบอร์ดที่ชัดเจน ในเฟสต่อไป OneMember จะเพิ่มข้อมูลเชิงลึกบนข้อมูลสมาชิกของคุณ"</a:t>
             </a:r>
           </a:p>
-          <a:p/>
+          <a:p>
+            <a:endParaRPr/>
+          </a:p>
           <a:p>
             <a:r>
               <a:t>ความสามารถที่กำลังจะมา:</a:t>
@@ -669,13 +477,17 @@
               <a:t>• ดึงลูกค้ากลับอัตโนมัติ — ส่งออฟเฟอร์เมื่อหายไป 30 วัน</a:t>
             </a:r>
           </a:p>
-          <a:p/>
+          <a:p>
+            <a:endParaRPr/>
+          </a:p>
           <a:p>
             <a:r>
               <a:t>"เรากำลังสร้าง CRM ที่ธุรกิจท้องถิ่นไม่เคยเข้าถึงได้มาก่อน"</a:t>
             </a:r>
           </a:p>
-          <a:p/>
+          <a:p>
+            <a:endParaRPr/>
+          </a:p>
         </p:txBody>
       </p:sp>
       <p:sp>
@@ -685,7 +497,7 @@
             <a:spLocks noGrp="1"/>
           </p:cNvSpPr>
           <p:nvPr>
-            <p:ph type="sldNum" idx="5" sz="quarter"/>
+            <p:ph type="sldNum" sz="quarter" idx="5"/>
           </p:nvPr>
         </p:nvSpPr>
         <p:spPr/>
@@ -699,7 +511,7 @@
 </file>
 
 <file path=ppt/notesSlides/notesSlide11.xml><?xml version="1.0" encoding="utf-8"?>
-<p:notes xmlns:a="http://schemas.openxmlformats.org/drawingml/2006/main" xmlns:p="http://schemas.openxmlformats.org/presentationml/2006/main" xmlns:r="http://schemas.openxmlformats.org/officeDocument/2006/relationships">
+<p:notes xmlns:a="http://schemas.openxmlformats.org/drawingml/2006/main" xmlns:r="http://schemas.openxmlformats.org/officeDocument/2006/relationships" xmlns:p="http://schemas.openxmlformats.org/presentationml/2006/main">
   <p:cSld>
     <p:spTree>
       <p:nvGrpSpPr>
@@ -719,7 +531,7 @@
         <p:nvSpPr>
           <p:cNvPr id="2" name="Slide Image Placeholder 1"/>
           <p:cNvSpPr>
-            <a:spLocks noGrp="1"/>
+            <a:spLocks noGrp="1" noRot="1" noChangeAspect="1"/>
           </p:cNvSpPr>
           <p:nvPr>
             <p:ph type="sldImg" idx="2"/>
@@ -734,7 +546,7 @@
             <a:spLocks noGrp="1"/>
           </p:cNvSpPr>
           <p:nvPr>
-            <p:ph type="body" idx="3" sz="quarter"/>
+            <p:ph type="body" sz="quarter" idx="3"/>
           </p:nvPr>
         </p:nvSpPr>
         <p:spPr/>
@@ -746,13 +558,17 @@
               <a:t>สไลด์ 11 — วิสัยทัศน์ (เป้าหมาย: 1 นาที)</a:t>
             </a:r>
           </a:p>
-          <a:p/>
+          <a:p>
+            <a:endParaRPr/>
+          </a:p>
           <a:p>
             <a:r>
               <a:t>ทิศทาง ไม่ใช่คำสัญญา พูดสั้น ๆ</a:t>
             </a:r>
           </a:p>
-          <a:p/>
+          <a:p>
+            <a:endParaRPr/>
+          </a:p>
           <a:p>
             <a:r>
               <a:t>เฟส 1 (ตอนนี้): ระบบสมาชิกสำหรับผู้ประกอบการ</a:t>
@@ -793,13 +609,17 @@
               <a:t>เฟส 8: ขยายภูมิภาค — จากไทยสู่เอเชียตะวันออกเฉียงใต้</a:t>
             </a:r>
           </a:p>
-          <a:p/>
+          <a:p>
+            <a:endParaRPr/>
+          </a:p>
           <a:p>
             <a:r>
               <a:t>"เรากำลังสร้างระบบปฏิบัติการสำหรับธุรกิจท้องถิ่น"</a:t>
             </a:r>
           </a:p>
-          <a:p/>
+          <a:p>
+            <a:endParaRPr/>
+          </a:p>
         </p:txBody>
       </p:sp>
       <p:sp>
@@ -809,7 +629,7 @@
             <a:spLocks noGrp="1"/>
           </p:cNvSpPr>
           <p:nvPr>
-            <p:ph type="sldNum" idx="5" sz="quarter"/>
+            <p:ph type="sldNum" sz="quarter" idx="5"/>
           </p:nvPr>
         </p:nvSpPr>
         <p:spPr/>
@@ -823,7 +643,7 @@
 </file>
 
 <file path=ppt/notesSlides/notesSlide12.xml><?xml version="1.0" encoding="utf-8"?>
-<p:notes xmlns:a="http://schemas.openxmlformats.org/drawingml/2006/main" xmlns:p="http://schemas.openxmlformats.org/presentationml/2006/main" xmlns:r="http://schemas.openxmlformats.org/officeDocument/2006/relationships">
+<p:notes xmlns:a="http://schemas.openxmlformats.org/drawingml/2006/main" xmlns:r="http://schemas.openxmlformats.org/officeDocument/2006/relationships" xmlns:p="http://schemas.openxmlformats.org/presentationml/2006/main">
   <p:cSld>
     <p:spTree>
       <p:nvGrpSpPr>
@@ -843,7 +663,7 @@
         <p:nvSpPr>
           <p:cNvPr id="2" name="Slide Image Placeholder 1"/>
           <p:cNvSpPr>
-            <a:spLocks noGrp="1"/>
+            <a:spLocks noGrp="1" noRot="1" noChangeAspect="1"/>
           </p:cNvSpPr>
           <p:nvPr>
             <p:ph type="sldImg" idx="2"/>
@@ -858,7 +678,7 @@
             <a:spLocks noGrp="1"/>
           </p:cNvSpPr>
           <p:nvPr>
-            <p:ph type="body" idx="3" sz="quarter"/>
+            <p:ph type="body" sz="quarter" idx="3"/>
           </p:nvPr>
         </p:nvSpPr>
         <p:spPr/>
@@ -870,13 +690,17 @@
               <a:t>สไลด์ 12 — ทำไม OneMember ถึงแตกต่าง (เป้าหมาย: 1 นาที)</a:t>
             </a:r>
           </a:p>
-          <a:p/>
+          <a:p>
+            <a:endParaRPr/>
+          </a:p>
           <a:p>
             <a:r>
               <a:t>ปิดเรื่องราว 6 เหตุผลที่แท้จริง</a:t>
             </a:r>
           </a:p>
-          <a:p/>
+          <a:p>
+            <a:endParaRPr/>
+          </a:p>
           <a:p>
             <a:r>
               <a:t>1. ออกแบบเพื่อผู้ประกอบการ — ทุกฟีเจอร์สร้างเพื่อการเติบโต ไม่ใช่คะแนนแอปสโตร์</a:t>
@@ -907,13 +731,17 @@
               <a:t>6. ขยายได้ตามธุรกิจ — เริ่มสาขาเดียว เติบโตเป็นเชน ระบบเดิม</a:t>
             </a:r>
           </a:p>
-          <a:p/>
+          <a:p>
+            <a:endParaRPr/>
+          </a:p>
           <a:p>
             <a:r>
               <a:t>"เราสร้างสิ่งนี้สำหรับผู้ประกอบการอย่างคุณ"</a:t>
             </a:r>
           </a:p>
-          <a:p/>
+          <a:p>
+            <a:endParaRPr/>
+          </a:p>
         </p:txBody>
       </p:sp>
       <p:sp>
@@ -923,7 +751,7 @@
             <a:spLocks noGrp="1"/>
           </p:cNvSpPr>
           <p:nvPr>
-            <p:ph type="sldNum" idx="5" sz="quarter"/>
+            <p:ph type="sldNum" sz="quarter" idx="5"/>
           </p:nvPr>
         </p:nvSpPr>
         <p:spPr/>
@@ -937,7 +765,7 @@
 </file>
 
 <file path=ppt/notesSlides/notesSlide13.xml><?xml version="1.0" encoding="utf-8"?>
-<p:notes xmlns:a="http://schemas.openxmlformats.org/drawingml/2006/main" xmlns:p="http://schemas.openxmlformats.org/presentationml/2006/main" xmlns:r="http://schemas.openxmlformats.org/officeDocument/2006/relationships">
+<p:notes xmlns:a="http://schemas.openxmlformats.org/drawingml/2006/main" xmlns:r="http://schemas.openxmlformats.org/officeDocument/2006/relationships" xmlns:p="http://schemas.openxmlformats.org/presentationml/2006/main">
   <p:cSld>
     <p:spTree>
       <p:nvGrpSpPr>
@@ -957,7 +785,7 @@
         <p:nvSpPr>
           <p:cNvPr id="2" name="Slide Image Placeholder 1"/>
           <p:cNvSpPr>
-            <a:spLocks noGrp="1"/>
+            <a:spLocks noGrp="1" noRot="1" noChangeAspect="1"/>
           </p:cNvSpPr>
           <p:nvPr>
             <p:ph type="sldImg" idx="2"/>
@@ -972,7 +800,7 @@
             <a:spLocks noGrp="1"/>
           </p:cNvSpPr>
           <p:nvPr>
-            <p:ph type="body" idx="3" sz="quarter"/>
+            <p:ph type="body" sz="quarter" idx="3"/>
           </p:nvPr>
         </p:nvSpPr>
         <p:spPr/>
@@ -984,13 +812,17 @@
               <a:t>สไลด์ 13 — Call to Action (เป้าหมาย: 1 นาที)</a:t>
             </a:r>
           </a:p>
-          <a:p/>
+          <a:p>
+            <a:endParaRPr/>
+          </a:p>
           <a:p>
             <a:r>
               <a:t>ปิดด้วยตัวเลือกที่ชัดเจน 3 ทาง</a:t>
             </a:r>
           </a:p>
-          <a:p/>
+          <a:p>
+            <a:endParaRPr/>
+          </a:p>
           <a:p>
             <a:r>
               <a:t>ก. เริ่มเลยวันนี้ — เปิดโน้ตบุ๊ก สมัครตอนนี้เลย ใช้เวลา 5 นาที</a:t>
@@ -1006,19 +838,25 @@
               <a:t>ค. เรียนรู้เพิ่มเติม — รับสรุปหน้าเดียวกลับบ้าน นัดติดตามผลภายใน 48 ชั่วโมง</a:t>
             </a:r>
           </a:p>
-          <a:p/>
+          <a:p>
+            <a:endParaRPr/>
+          </a:p>
           <a:p>
             <a:r>
               <a:t>กฎ: อย่าออกจากการสนทนาโดยไม่มีขั้นตอนถัดไป — วันที่ เวลา และคำมั่น</a:t>
             </a:r>
           </a:p>
-          <a:p/>
+          <a:p>
+            <a:endParaRPr/>
+          </a:p>
           <a:p>
             <a:r>
               <a:t>ถามว่า: "สำหรับคุณวันนี้ ทางเลือกไหนเหมาะสมที่สุด?"</a:t>
             </a:r>
           </a:p>
-          <a:p/>
+          <a:p>
+            <a:endParaRPr/>
+          </a:p>
         </p:txBody>
       </p:sp>
       <p:sp>
@@ -1028,7 +866,7 @@
             <a:spLocks noGrp="1"/>
           </p:cNvSpPr>
           <p:nvPr>
-            <p:ph type="sldNum" idx="5" sz="quarter"/>
+            <p:ph type="sldNum" sz="quarter" idx="5"/>
           </p:nvPr>
         </p:nvSpPr>
         <p:spPr/>
@@ -1042,7 +880,7 @@
 </file>
 
 <file path=ppt/notesSlides/notesSlide2.xml><?xml version="1.0" encoding="utf-8"?>
-<p:notes xmlns:a="http://schemas.openxmlformats.org/drawingml/2006/main" xmlns:p="http://schemas.openxmlformats.org/presentationml/2006/main" xmlns:r="http://schemas.openxmlformats.org/officeDocument/2006/relationships">
+<p:notes xmlns:a="http://schemas.openxmlformats.org/drawingml/2006/main" xmlns:r="http://schemas.openxmlformats.org/officeDocument/2006/relationships" xmlns:p="http://schemas.openxmlformats.org/presentationml/2006/main">
   <p:cSld>
     <p:spTree>
       <p:nvGrpSpPr>
@@ -1062,7 +900,7 @@
         <p:nvSpPr>
           <p:cNvPr id="2" name="Slide Image Placeholder 1"/>
           <p:cNvSpPr>
-            <a:spLocks noGrp="1"/>
+            <a:spLocks noGrp="1" noRot="1" noChangeAspect="1"/>
           </p:cNvSpPr>
           <p:nvPr>
             <p:ph type="sldImg" idx="2"/>
@@ -1077,7 +915,7 @@
             <a:spLocks noGrp="1"/>
           </p:cNvSpPr>
           <p:nvPr>
-            <p:ph type="body" idx="3" sz="quarter"/>
+            <p:ph type="body" sz="quarter" idx="3"/>
           </p:nvPr>
         </p:nvSpPr>
         <p:spPr/>
@@ -1089,13 +927,17 @@
               <a:t>สไลด์ 2 — ปัญหา (เป้าหมาย: 2 นาที)</a:t>
             </a:r>
           </a:p>
-          <a:p/>
+          <a:p>
+            <a:endParaRPr/>
+          </a:p>
           <a:p>
             <a:r>
               <a:t>ทำให้ผู้ประกอบการรู้สึกว่าเราเข้าใจเขา ก่อนนำเสนอวิธีแก้ปัญหา</a:t>
             </a:r>
           </a:p>
-          <a:p/>
+          <a:p>
+            <a:endParaRPr/>
+          </a:p>
           <a:p>
             <a:r>
               <a:t>• บัตรสะสมแต้มกระดาษ หายง่าย เสียหายง่าย ลูกค้าลืม — ผู้ประกอบการไม่ได้ข้อมูลอะไรเลย</a:t>
@@ -1121,13 +963,17 @@
               <a:t>• คู่แข่งที่มีระบบสมาชิกดิจิทัลได้เปรียบกว่ามาก</a:t>
             </a:r>
           </a:p>
-          <a:p/>
+          <a:p>
+            <a:endParaRPr/>
+          </a:p>
           <a:p>
             <a:r>
               <a:t>ถามว่า: "คุณรู้ได้อย่างไรว่าลูกค้าคนไหนไม่กลับมาในรอบ 3 เดือน?"</a:t>
             </a:r>
           </a:p>
-          <a:p/>
+          <a:p>
+            <a:endParaRPr/>
+          </a:p>
         </p:txBody>
       </p:sp>
       <p:sp>
@@ -1137,7 +983,7 @@
             <a:spLocks noGrp="1"/>
           </p:cNvSpPr>
           <p:nvPr>
-            <p:ph type="sldNum" idx="5" sz="quarter"/>
+            <p:ph type="sldNum" sz="quarter" idx="5"/>
           </p:nvPr>
         </p:nvSpPr>
         <p:spPr/>
@@ -1151,7 +997,7 @@
 </file>
 
 <file path=ppt/notesSlides/notesSlide3.xml><?xml version="1.0" encoding="utf-8"?>
-<p:notes xmlns:a="http://schemas.openxmlformats.org/drawingml/2006/main" xmlns:p="http://schemas.openxmlformats.org/presentationml/2006/main" xmlns:r="http://schemas.openxmlformats.org/officeDocument/2006/relationships">
+<p:notes xmlns:a="http://schemas.openxmlformats.org/drawingml/2006/main" xmlns:r="http://schemas.openxmlformats.org/officeDocument/2006/relationships" xmlns:p="http://schemas.openxmlformats.org/presentationml/2006/main">
   <p:cSld>
     <p:spTree>
       <p:nvGrpSpPr>
@@ -1171,7 +1017,7 @@
         <p:nvSpPr>
           <p:cNvPr id="2" name="Slide Image Placeholder 1"/>
           <p:cNvSpPr>
-            <a:spLocks noGrp="1"/>
+            <a:spLocks noGrp="1" noRot="1" noChangeAspect="1"/>
           </p:cNvSpPr>
           <p:nvPr>
             <p:ph type="sldImg" idx="2"/>
@@ -1186,7 +1032,7 @@
             <a:spLocks noGrp="1"/>
           </p:cNvSpPr>
           <p:nvPr>
-            <p:ph type="body" idx="3" sz="quarter"/>
+            <p:ph type="body" sz="quarter" idx="3"/>
           </p:nvPr>
         </p:nvSpPr>
         <p:spPr/>
@@ -1198,13 +1044,17 @@
               <a:t>สไลด์ 3 — ต้นทุน (เป้าหมาย: 1 นาที)</a:t>
             </a:r>
           </a:p>
-          <a:p/>
+          <a:p>
+            <a:endParaRPr/>
+          </a:p>
           <a:p>
             <a:r>
               <a:t>ปล่อยให้ตัวเลขพูดแทน อย่ารีบเกินไป</a:t>
             </a:r>
           </a:p>
-          <a:p/>
+          <a:p>
+            <a:endParaRPr/>
+          </a:p>
           <a:p>
             <a:r>
               <a:t>• หาลูกค้าใหม่แพงกว่ารักษาลูกค้าเดิม 5–7 เท่า</a:t>
@@ -1220,19 +1070,25 @@
               <a:t>• เพิ่มการรักษาลูกค้าแค่ 5% กำไรเพิ่มได้ 25–95% (Bain &amp; Company)</a:t>
             </a:r>
           </a:p>
-          <a:p/>
+          <a:p>
+            <a:endParaRPr/>
+          </a:p>
           <a:p>
             <a:r>
               <a:t>ทำให้การรักษาลูกค้ารู้สึกเป็นกิจกรรมที่ ROI สูงที่สุด</a:t>
             </a:r>
           </a:p>
-          <a:p/>
+          <a:p>
+            <a:endParaRPr/>
+          </a:p>
           <a:p>
             <a:r>
               <a:t>ถามว่า: "ถ้าดึงลูกค้าเก่ากลับมาได้ 20% มันจะเปลี่ยนธุรกิจของคุณได้แค่ไหน?"</a:t>
             </a:r>
           </a:p>
-          <a:p/>
+          <a:p>
+            <a:endParaRPr/>
+          </a:p>
         </p:txBody>
       </p:sp>
       <p:sp>
@@ -1242,7 +1098,7 @@
             <a:spLocks noGrp="1"/>
           </p:cNvSpPr>
           <p:nvPr>
-            <p:ph type="sldNum" idx="5" sz="quarter"/>
+            <p:ph type="sldNum" sz="quarter" idx="5"/>
           </p:nvPr>
         </p:nvSpPr>
         <p:spPr/>
@@ -1256,7 +1112,7 @@
 </file>
 
 <file path=ppt/notesSlides/notesSlide4.xml><?xml version="1.0" encoding="utf-8"?>
-<p:notes xmlns:a="http://schemas.openxmlformats.org/drawingml/2006/main" xmlns:p="http://schemas.openxmlformats.org/presentationml/2006/main" xmlns:r="http://schemas.openxmlformats.org/officeDocument/2006/relationships">
+<p:notes xmlns:a="http://schemas.openxmlformats.org/drawingml/2006/main" xmlns:r="http://schemas.openxmlformats.org/officeDocument/2006/relationships" xmlns:p="http://schemas.openxmlformats.org/presentationml/2006/main">
   <p:cSld>
     <p:spTree>
       <p:nvGrpSpPr>
@@ -1276,7 +1132,7 @@
         <p:nvSpPr>
           <p:cNvPr id="2" name="Slide Image Placeholder 1"/>
           <p:cNvSpPr>
-            <a:spLocks noGrp="1"/>
+            <a:spLocks noGrp="1" noRot="1" noChangeAspect="1"/>
           </p:cNvSpPr>
           <p:nvPr>
             <p:ph type="sldImg" idx="2"/>
@@ -1291,7 +1147,7 @@
             <a:spLocks noGrp="1"/>
           </p:cNvSpPr>
           <p:nvPr>
-            <p:ph type="body" idx="3" sz="quarter"/>
+            <p:ph type="body" sz="quarter" idx="3"/>
           </p:nvPr>
         </p:nvSpPr>
         <p:spPr/>
@@ -1303,13 +1159,17 @@
               <a:t>สไลด์ 4 — แนะนำ OneMember (เป้าหมาย: 2 นาที)</a:t>
             </a:r>
           </a:p>
-          <a:p/>
+          <a:p>
+            <a:endParaRPr/>
+          </a:p>
           <a:p>
             <a:r>
               <a:t>5 เสาหลัก: ดึงดูด / รักษา / มอบรางวัล / เข้าใจ / เติบโต</a:t>
             </a:r>
           </a:p>
-          <a:p/>
+          <a:p>
+            <a:endParaRPr/>
+          </a:p>
           <a:p>
             <a:r>
               <a:t>• ดึงดูด — สแกน QR สมัครสมาชิกในไม่กี่วินาที ไม่ต้องโหลดแอป</a:t>
@@ -1335,13 +1195,17 @@
               <a:t>• เติบโต — ข้อมูลที่แปลงเป็นแคมเปญที่ได้ผล</a:t>
             </a:r>
           </a:p>
-          <a:p/>
+          <a:p>
+            <a:endParaRPr/>
+          </a:p>
           <a:p>
             <a:r>
               <a:t>วางตำแหน่ง: "เราไม่ใช่แอปสะสมแต้ม เราคือแพลตฟอร์มการเติบโตสำหรับผู้ประกอบการ"</a:t>
             </a:r>
           </a:p>
-          <a:p/>
+          <a:p>
+            <a:endParaRPr/>
+          </a:p>
         </p:txBody>
       </p:sp>
       <p:sp>
@@ -1351,7 +1215,7 @@
             <a:spLocks noGrp="1"/>
           </p:cNvSpPr>
           <p:nvPr>
-            <p:ph type="sldNum" idx="5" sz="quarter"/>
+            <p:ph type="sldNum" sz="quarter" idx="5"/>
           </p:nvPr>
         </p:nvSpPr>
         <p:spPr/>
@@ -1365,7 +1229,7 @@
 </file>
 
 <file path=ppt/notesSlides/notesSlide5.xml><?xml version="1.0" encoding="utf-8"?>
-<p:notes xmlns:a="http://schemas.openxmlformats.org/drawingml/2006/main" xmlns:p="http://schemas.openxmlformats.org/presentationml/2006/main" xmlns:r="http://schemas.openxmlformats.org/officeDocument/2006/relationships">
+<p:notes xmlns:a="http://schemas.openxmlformats.org/drawingml/2006/main" xmlns:r="http://schemas.openxmlformats.org/officeDocument/2006/relationships" xmlns:p="http://schemas.openxmlformats.org/presentationml/2006/main">
   <p:cSld>
     <p:spTree>
       <p:nvGrpSpPr>
@@ -1385,7 +1249,7 @@
         <p:nvSpPr>
           <p:cNvPr id="2" name="Slide Image Placeholder 1"/>
           <p:cNvSpPr>
-            <a:spLocks noGrp="1"/>
+            <a:spLocks noGrp="1" noRot="1" noChangeAspect="1"/>
           </p:cNvSpPr>
           <p:nvPr>
             <p:ph type="sldImg" idx="2"/>
@@ -1400,7 +1264,7 @@
             <a:spLocks noGrp="1"/>
           </p:cNvSpPr>
           <p:nvPr>
-            <p:ph type="body" idx="3" sz="quarter"/>
+            <p:ph type="body" sz="quarter" idx="3"/>
           </p:nvPr>
         </p:nvSpPr>
         <p:spPr/>
@@ -1412,13 +1276,17 @@
               <a:t>สไลด์ 5 — เส้นทางของผู้ประกอบการ (เป้าหมาย: 2 นาที)</a:t>
             </a:r>
           </a:p>
-          <a:p/>
+          <a:p>
+            <a:endParaRPr/>
+          </a:p>
           <a:p>
             <a:r>
               <a:t>พาผ่านแต่ละขั้นตอน ทำให้รู้สึกว่าทำได้จริง</a:t>
             </a:r>
           </a:p>
-          <a:p/>
+          <a:p>
+            <a:endParaRPr/>
+          </a:p>
           <a:p>
             <a:r>
               <a:t>1. สมัครใช้งาน — 5 นาที ไม่ต้องทำสัญญา</a:t>
@@ -1449,13 +1317,17 @@
               <a:t>6. เติบโต — ข้อมูลขับเคลื่อนแคมเปญและการดึงลูกค้ากลับ</a:t>
             </a:r>
           </a:p>
-          <a:p/>
+          <a:p>
+            <a:endParaRPr/>
+          </a:p>
           <a:p>
             <a:r>
               <a:t>ถามว่า: "ขั้นตอนไหนที่มีคุณค่าที่สุดสำหรับธุรกิจของคุณตอนนี้?"</a:t>
             </a:r>
           </a:p>
-          <a:p/>
+          <a:p>
+            <a:endParaRPr/>
+          </a:p>
         </p:txBody>
       </p:sp>
       <p:sp>
@@ -1465,7 +1337,7 @@
             <a:spLocks noGrp="1"/>
           </p:cNvSpPr>
           <p:nvPr>
-            <p:ph type="sldNum" idx="5" sz="quarter"/>
+            <p:ph type="sldNum" sz="quarter" idx="5"/>
           </p:nvPr>
         </p:nvSpPr>
         <p:spPr/>
@@ -1479,7 +1351,7 @@
 </file>
 
 <file path=ppt/notesSlides/notesSlide6.xml><?xml version="1.0" encoding="utf-8"?>
-<p:notes xmlns:a="http://schemas.openxmlformats.org/drawingml/2006/main" xmlns:p="http://schemas.openxmlformats.org/presentationml/2006/main" xmlns:r="http://schemas.openxmlformats.org/officeDocument/2006/relationships">
+<p:notes xmlns:a="http://schemas.openxmlformats.org/drawingml/2006/main" xmlns:r="http://schemas.openxmlformats.org/officeDocument/2006/relationships" xmlns:p="http://schemas.openxmlformats.org/presentationml/2006/main">
   <p:cSld>
     <p:spTree>
       <p:nvGrpSpPr>
@@ -1499,7 +1371,7 @@
         <p:nvSpPr>
           <p:cNvPr id="2" name="Slide Image Placeholder 1"/>
           <p:cNvSpPr>
-            <a:spLocks noGrp="1"/>
+            <a:spLocks noGrp="1" noRot="1" noChangeAspect="1"/>
           </p:cNvSpPr>
           <p:nvPr>
             <p:ph type="sldImg" idx="2"/>
@@ -1514,7 +1386,7 @@
             <a:spLocks noGrp="1"/>
           </p:cNvSpPr>
           <p:nvPr>
-            <p:ph type="body" idx="3" sz="quarter"/>
+            <p:ph type="body" sz="quarter" idx="3"/>
           </p:nvPr>
         </p:nvSpPr>
         <p:spPr/>
@@ -1526,13 +1398,17 @@
               <a:t>สไลด์ 6 — เส้นทางของลูกค้า (เป้าหมาย: 1 นาที)</a:t>
             </a:r>
           </a:p>
-          <a:p/>
+          <a:p>
+            <a:endParaRPr/>
+          </a:p>
           <a:p>
             <a:r>
               <a:t>การสมัครครั้งแรกออกแบบให้ใช้เวลาไม่ถึง 30 วินาที</a:t>
             </a:r>
           </a:p>
-          <a:p/>
+          <a:p>
+            <a:endParaRPr/>
+          </a:p>
           <a:p>
             <a:r>
               <a:t>1. เยี่ยมชม — ลูกค้าเดินเข้าร้าน</a:t>
@@ -1568,13 +1444,17 @@
               <a:t>7. กลับมาอีก — รางวัลดึงดูดให้กลับมาซ้ำ</a:t>
             </a:r>
           </a:p>
-          <a:p/>
+          <a:p>
+            <a:endParaRPr/>
+          </a:p>
           <a:p>
             <a:r>
               <a:t>เป้าหมายหลัก: "ลูกค้าสมัครสมาชิกได้ภายใน 30 วินาที"</a:t>
             </a:r>
           </a:p>
-          <a:p/>
+          <a:p>
+            <a:endParaRPr/>
+          </a:p>
         </p:txBody>
       </p:sp>
       <p:sp>
@@ -1584,7 +1464,7 @@
             <a:spLocks noGrp="1"/>
           </p:cNvSpPr>
           <p:nvPr>
-            <p:ph type="sldNum" idx="5" sz="quarter"/>
+            <p:ph type="sldNum" sz="quarter" idx="5"/>
           </p:nvPr>
         </p:nvSpPr>
         <p:spPr/>
@@ -1598,7 +1478,7 @@
 </file>
 
 <file path=ppt/notesSlides/notesSlide7.xml><?xml version="1.0" encoding="utf-8"?>
-<p:notes xmlns:a="http://schemas.openxmlformats.org/drawingml/2006/main" xmlns:p="http://schemas.openxmlformats.org/presentationml/2006/main" xmlns:r="http://schemas.openxmlformats.org/officeDocument/2006/relationships">
+<p:notes xmlns:a="http://schemas.openxmlformats.org/drawingml/2006/main" xmlns:r="http://schemas.openxmlformats.org/officeDocument/2006/relationships" xmlns:p="http://schemas.openxmlformats.org/presentationml/2006/main">
   <p:cSld>
     <p:spTree>
       <p:nvGrpSpPr>
@@ -1618,7 +1498,7 @@
         <p:nvSpPr>
           <p:cNvPr id="2" name="Slide Image Placeholder 1"/>
           <p:cNvSpPr>
-            <a:spLocks noGrp="1"/>
+            <a:spLocks noGrp="1" noRot="1" noChangeAspect="1"/>
           </p:cNvSpPr>
           <p:nvPr>
             <p:ph type="sldImg" idx="2"/>
@@ -1633,7 +1513,7 @@
             <a:spLocks noGrp="1"/>
           </p:cNvSpPr>
           <p:nvPr>
-            <p:ph type="body" idx="3" sz="quarter"/>
+            <p:ph type="body" sz="quarter" idx="3"/>
           </p:nvPr>
         </p:nvSpPr>
         <p:spPr/>
@@ -1645,31 +1525,41 @@
               <a:t>สไลด์ 7 — เปรียบเทียบ (เป้าหมาย: 2 นาที)</a:t>
             </a:r>
           </a:p>
-          <a:p/>
+          <a:p>
+            <a:endParaRPr/>
+          </a:p>
           <a:p>
             <a:r>
               <a:t>จัดการข้อสงสัยก่อนที่จะถูกถาม</a:t>
             </a:r>
           </a:p>
-          <a:p/>
+          <a:p>
+            <a:endParaRPr/>
+          </a:p>
           <a:p>
             <a:r>
               <a:t>แบบดั้งเดิม: บัตรหาย ไม่มีข้อมูล ติดตามด้วยมือ ไม่มีอัตโนมัติ ไม่มีรายงาน ค่าใช้จ่ายสูง</a:t>
             </a:r>
           </a:p>
-          <a:p/>
+          <a:p>
+            <a:endParaRPr/>
+          </a:p>
           <a:p>
             <a:r>
               <a:t>OneMember: ดิจิทัลบนโทรศัพท์ทุกรุ่น โปรไฟล์สมาชิกจากการสแกนครั้งแรก ติดตามอัตโนมัติ อีเมลวันเกิดและดึงกลับอัตโนมัติ แดชบอร์ดเรียลไทม์ ค่ารายเดือนราคาเหมาะสม</a:t>
             </a:r>
           </a:p>
-          <a:p/>
+          <a:p>
+            <a:endParaRPr/>
+          </a:p>
           <a:p>
             <a:r>
               <a:t>ถามว่า: "ถ้าเห็นประวัติการมาของลูกค้าทุกคนในหน้าจอเดียว มันจะเปลี่ยนวิธีทำโปรโมชันของคุณยังไง?"</a:t>
             </a:r>
           </a:p>
-          <a:p/>
+          <a:p>
+            <a:endParaRPr/>
+          </a:p>
         </p:txBody>
       </p:sp>
       <p:sp>
@@ -1679,7 +1569,7 @@
             <a:spLocks noGrp="1"/>
           </p:cNvSpPr>
           <p:nvPr>
-            <p:ph type="sldNum" idx="5" sz="quarter"/>
+            <p:ph type="sldNum" sz="quarter" idx="5"/>
           </p:nvPr>
         </p:nvSpPr>
         <p:spPr/>
@@ -1693,7 +1583,7 @@
 </file>
 
 <file path=ppt/notesSlides/notesSlide8.xml><?xml version="1.0" encoding="utf-8"?>
-<p:notes xmlns:a="http://schemas.openxmlformats.org/drawingml/2006/main" xmlns:p="http://schemas.openxmlformats.org/presentationml/2006/main" xmlns:r="http://schemas.openxmlformats.org/officeDocument/2006/relationships">
+<p:notes xmlns:a="http://schemas.openxmlformats.org/drawingml/2006/main" xmlns:r="http://schemas.openxmlformats.org/officeDocument/2006/relationships" xmlns:p="http://schemas.openxmlformats.org/presentationml/2006/main">
   <p:cSld>
     <p:spTree>
       <p:nvGrpSpPr>
@@ -1713,7 +1603,7 @@
         <p:nvSpPr>
           <p:cNvPr id="2" name="Slide Image Placeholder 1"/>
           <p:cNvSpPr>
-            <a:spLocks noGrp="1"/>
+            <a:spLocks noGrp="1" noRot="1" noChangeAspect="1"/>
           </p:cNvSpPr>
           <p:nvPr>
             <p:ph type="sldImg" idx="2"/>
@@ -1728,7 +1618,7 @@
             <a:spLocks noGrp="1"/>
           </p:cNvSpPr>
           <p:nvPr>
-            <p:ph type="body" idx="3" sz="quarter"/>
+            <p:ph type="body" sz="quarter" idx="3"/>
           </p:nvPr>
         </p:nvSpPr>
         <p:spPr/>
@@ -1740,13 +1630,17 @@
               <a:t>สไลด์ 8 — ประโยชน์สำหรับผู้ประกอบการ (เป้าหมาย: 1 นาที)</a:t>
             </a:r>
           </a:p>
-          <a:p/>
+          <a:p>
+            <a:endParaRPr/>
+          </a:p>
           <a:p>
             <a:r>
               <a:t>เชื่อมแต่ละประโยชน์กับปัญหาจริง</a:t>
             </a:r>
           </a:p>
-          <a:p/>
+          <a:p>
+            <a:endParaRPr/>
+          </a:p>
           <a:p>
             <a:r>
               <a:t>1. เพิ่มฐานสมาชิกอัตโนมัติทุกครั้งที่ลูกค้าเข้ามา</a:t>
@@ -1787,7 +1681,9 @@
               <a:t>8. ตั้งค่าได้ภายใน 10 นาที ไม่ต้องมีทีม IT</a:t>
             </a:r>
           </a:p>
-          <a:p/>
+          <a:p>
+            <a:endParaRPr/>
+          </a:p>
         </p:txBody>
       </p:sp>
       <p:sp>
@@ -1797,7 +1693,7 @@
             <a:spLocks noGrp="1"/>
           </p:cNvSpPr>
           <p:nvPr>
-            <p:ph type="sldNum" idx="5" sz="quarter"/>
+            <p:ph type="sldNum" sz="quarter" idx="5"/>
           </p:nvPr>
         </p:nvSpPr>
         <p:spPr/>
@@ -1811,7 +1707,7 @@
 </file>
 
 <file path=ppt/notesSlides/notesSlide9.xml><?xml version="1.0" encoding="utf-8"?>
-<p:notes xmlns:a="http://schemas.openxmlformats.org/drawingml/2006/main" xmlns:p="http://schemas.openxmlformats.org/presentationml/2006/main" xmlns:r="http://schemas.openxmlformats.org/officeDocument/2006/relationships">
+<p:notes xmlns:a="http://schemas.openxmlformats.org/drawingml/2006/main" xmlns:r="http://schemas.openxmlformats.org/officeDocument/2006/relationships" xmlns:p="http://schemas.openxmlformats.org/presentationml/2006/main">
   <p:cSld>
     <p:spTree>
       <p:nvGrpSpPr>
@@ -1831,7 +1727,7 @@
         <p:nvSpPr>
           <p:cNvPr id="2" name="Slide Image Placeholder 1"/>
           <p:cNvSpPr>
-            <a:spLocks noGrp="1"/>
+            <a:spLocks noGrp="1" noRot="1" noChangeAspect="1"/>
           </p:cNvSpPr>
           <p:nvPr>
             <p:ph type="sldImg" idx="2"/>
@@ -1846,7 +1742,7 @@
             <a:spLocks noGrp="1"/>
           </p:cNvSpPr>
           <p:nvPr>
-            <p:ph type="body" idx="3" sz="quarter"/>
+            <p:ph type="body" sz="quarter" idx="3"/>
           </p:nvPr>
         </p:nvSpPr>
         <p:spPr/>
@@ -1858,13 +1754,17 @@
               <a:t>สไลด์ 9 — ประโยชน์สำหรับลูกค้า (เป้าหมาย: 1 นาที)</a:t>
             </a:r>
           </a:p>
-          <a:p/>
+          <a:p>
+            <a:endParaRPr/>
+          </a:p>
           <a:p>
             <a:r>
               <a:t>ประสบการณ์ลูกค้าที่ดีขับเคลื่อนการใช้งาน</a:t>
             </a:r>
           </a:p>
-          <a:p/>
+          <a:p>
+            <a:endParaRPr/>
+          </a:p>
           <a:p>
             <a:r>
               <a:t>1. ไม่ต้องโหลดแอป — ใช้งานผ่านเบราว์เซอร์มือถือได้เลย</a:t>
@@ -1905,7 +1805,9 @@
               <a:t>8. บัตรดิจิทัล — หายไม่ได้ ลืมไม่ได้</a:t>
             </a:r>
           </a:p>
-          <a:p/>
+          <a:p>
+            <a:endParaRPr/>
+          </a:p>
         </p:txBody>
       </p:sp>
       <p:sp>
@@ -1915,7 +1817,7 @@
             <a:spLocks noGrp="1"/>
           </p:cNvSpPr>
           <p:nvPr>
-            <p:ph type="sldNum" idx="5" sz="quarter"/>
+            <p:ph type="sldNum" sz="quarter" idx="5"/>
           </p:nvPr>
         </p:nvSpPr>
         <p:spPr/>
@@ -1966,10 +1868,9 @@
           <a:lstStyle/>
           <a:p>
             <a:r>
-              <a:rPr lang="en-US" smtClean="0"/>
+              <a:rPr lang="en-US"/>
               <a:t>Click to edit Master title style</a:t>
             </a:r>
-            <a:endParaRPr lang="en-US"/>
           </a:p>
         </p:txBody>
       </p:sp>
@@ -2085,10 +1986,9 @@
           </a:lstStyle>
           <a:p>
             <a:r>
-              <a:rPr lang="en-US" smtClean="0"/>
+              <a:rPr lang="en-US"/>
               <a:t>Click to edit Master subtitle style</a:t>
             </a:r>
-            <a:endParaRPr lang="en-US"/>
           </a:p>
         </p:txBody>
       </p:sp>
@@ -2109,7 +2009,7 @@
           <a:p>
             <a:fld id="{5BCAD085-E8A6-8845-BD4E-CB4CCA059FC4}" type="datetimeFigureOut">
               <a:rPr lang="en-US" smtClean="0"/>
-              <a:t>1/27/13</a:t>
+              <a:t>7/2/26</a:t>
             </a:fld>
             <a:endParaRPr lang="en-US"/>
           </a:p>
@@ -2203,10 +2103,9 @@
           <a:lstStyle/>
           <a:p>
             <a:r>
-              <a:rPr lang="en-US" smtClean="0"/>
+              <a:rPr lang="en-US"/>
               <a:t>Click to edit Master title style</a:t>
             </a:r>
-            <a:endParaRPr lang="en-US"/>
           </a:p>
         </p:txBody>
       </p:sp>
@@ -2227,38 +2126,37 @@
           <a:p>
             <a:pPr lvl="0"/>
             <a:r>
-              <a:rPr lang="en-US" smtClean="0"/>
+              <a:rPr lang="en-US"/>
               <a:t>Click to edit Master text styles</a:t>
             </a:r>
           </a:p>
           <a:p>
             <a:pPr lvl="1"/>
             <a:r>
-              <a:rPr lang="en-US" smtClean="0"/>
+              <a:rPr lang="en-US"/>
               <a:t>Second level</a:t>
             </a:r>
           </a:p>
           <a:p>
             <a:pPr lvl="2"/>
             <a:r>
-              <a:rPr lang="en-US" smtClean="0"/>
+              <a:rPr lang="en-US"/>
               <a:t>Third level</a:t>
             </a:r>
           </a:p>
           <a:p>
             <a:pPr lvl="3"/>
             <a:r>
-              <a:rPr lang="en-US" smtClean="0"/>
+              <a:rPr lang="en-US"/>
               <a:t>Fourth level</a:t>
             </a:r>
           </a:p>
           <a:p>
             <a:pPr lvl="4"/>
             <a:r>
-              <a:rPr lang="en-US" smtClean="0"/>
+              <a:rPr lang="en-US"/>
               <a:t>Fifth level</a:t>
             </a:r>
-            <a:endParaRPr lang="en-US"/>
           </a:p>
         </p:txBody>
       </p:sp>
@@ -2279,7 +2177,7 @@
           <a:p>
             <a:fld id="{5BCAD085-E8A6-8845-BD4E-CB4CCA059FC4}" type="datetimeFigureOut">
               <a:rPr lang="en-US" smtClean="0"/>
-              <a:t>1/27/13</a:t>
+              <a:t>7/2/26</a:t>
             </a:fld>
             <a:endParaRPr lang="en-US"/>
           </a:p>
@@ -2378,10 +2276,9 @@
           <a:lstStyle/>
           <a:p>
             <a:r>
-              <a:rPr lang="en-US" smtClean="0"/>
+              <a:rPr lang="en-US"/>
               <a:t>Click to edit Master title style</a:t>
             </a:r>
-            <a:endParaRPr lang="en-US"/>
           </a:p>
         </p:txBody>
       </p:sp>
@@ -2407,38 +2304,37 @@
           <a:p>
             <a:pPr lvl="0"/>
             <a:r>
-              <a:rPr lang="en-US" smtClean="0"/>
+              <a:rPr lang="en-US"/>
               <a:t>Click to edit Master text styles</a:t>
             </a:r>
           </a:p>
           <a:p>
             <a:pPr lvl="1"/>
             <a:r>
-              <a:rPr lang="en-US" smtClean="0"/>
+              <a:rPr lang="en-US"/>
               <a:t>Second level</a:t>
             </a:r>
           </a:p>
           <a:p>
             <a:pPr lvl="2"/>
             <a:r>
-              <a:rPr lang="en-US" smtClean="0"/>
+              <a:rPr lang="en-US"/>
               <a:t>Third level</a:t>
             </a:r>
           </a:p>
           <a:p>
             <a:pPr lvl="3"/>
             <a:r>
-              <a:rPr lang="en-US" smtClean="0"/>
+              <a:rPr lang="en-US"/>
               <a:t>Fourth level</a:t>
             </a:r>
           </a:p>
           <a:p>
             <a:pPr lvl="4"/>
             <a:r>
-              <a:rPr lang="en-US" smtClean="0"/>
+              <a:rPr lang="en-US"/>
               <a:t>Fifth level</a:t>
             </a:r>
-            <a:endParaRPr lang="en-US"/>
           </a:p>
         </p:txBody>
       </p:sp>
@@ -2459,7 +2355,7 @@
           <a:p>
             <a:fld id="{5BCAD085-E8A6-8845-BD4E-CB4CCA059FC4}" type="datetimeFigureOut">
               <a:rPr lang="en-US" smtClean="0"/>
-              <a:t>1/27/13</a:t>
+              <a:t>7/2/26</a:t>
             </a:fld>
             <a:endParaRPr lang="en-US"/>
           </a:p>
@@ -2553,10 +2449,9 @@
           <a:lstStyle/>
           <a:p>
             <a:r>
-              <a:rPr lang="en-US" smtClean="0"/>
+              <a:rPr lang="en-US"/>
               <a:t>Click to edit Master title style</a:t>
             </a:r>
-            <a:endParaRPr lang="en-US"/>
           </a:p>
         </p:txBody>
       </p:sp>
@@ -2577,38 +2472,37 @@
           <a:p>
             <a:pPr lvl="0"/>
             <a:r>
-              <a:rPr lang="en-US" smtClean="0"/>
+              <a:rPr lang="en-US"/>
               <a:t>Click to edit Master text styles</a:t>
             </a:r>
           </a:p>
           <a:p>
             <a:pPr lvl="1"/>
             <a:r>
-              <a:rPr lang="en-US" smtClean="0"/>
+              <a:rPr lang="en-US"/>
               <a:t>Second level</a:t>
             </a:r>
           </a:p>
           <a:p>
             <a:pPr lvl="2"/>
             <a:r>
-              <a:rPr lang="en-US" smtClean="0"/>
+              <a:rPr lang="en-US"/>
               <a:t>Third level</a:t>
             </a:r>
           </a:p>
           <a:p>
             <a:pPr lvl="3"/>
             <a:r>
-              <a:rPr lang="en-US" smtClean="0"/>
+              <a:rPr lang="en-US"/>
               <a:t>Fourth level</a:t>
             </a:r>
           </a:p>
           <a:p>
             <a:pPr lvl="4"/>
             <a:r>
-              <a:rPr lang="en-US" smtClean="0"/>
+              <a:rPr lang="en-US"/>
               <a:t>Fifth level</a:t>
             </a:r>
-            <a:endParaRPr lang="en-US"/>
           </a:p>
         </p:txBody>
       </p:sp>
@@ -2629,7 +2523,7 @@
           <a:p>
             <a:fld id="{5BCAD085-E8A6-8845-BD4E-CB4CCA059FC4}" type="datetimeFigureOut">
               <a:rPr lang="en-US" smtClean="0"/>
-              <a:t>1/27/13</a:t>
+              <a:t>7/2/26</a:t>
             </a:fld>
             <a:endParaRPr lang="en-US"/>
           </a:p>
@@ -2732,10 +2626,9 @@
           </a:lstStyle>
           <a:p>
             <a:r>
-              <a:rPr lang="en-US" smtClean="0"/>
+              <a:rPr lang="en-US"/>
               <a:t>Click to edit Master title style</a:t>
             </a:r>
-            <a:endParaRPr lang="en-US"/>
           </a:p>
         </p:txBody>
       </p:sp>
@@ -2852,7 +2745,7 @@
           <a:p>
             <a:pPr lvl="0"/>
             <a:r>
-              <a:rPr lang="en-US" smtClean="0"/>
+              <a:rPr lang="en-US"/>
               <a:t>Click to edit Master text styles</a:t>
             </a:r>
           </a:p>
@@ -2875,7 +2768,7 @@
           <a:p>
             <a:fld id="{5BCAD085-E8A6-8845-BD4E-CB4CCA059FC4}" type="datetimeFigureOut">
               <a:rPr lang="en-US" smtClean="0"/>
-              <a:t>1/27/13</a:t>
+              <a:t>7/2/26</a:t>
             </a:fld>
             <a:endParaRPr lang="en-US"/>
           </a:p>
@@ -2969,10 +2862,9 @@
           <a:lstStyle/>
           <a:p>
             <a:r>
-              <a:rPr lang="en-US" smtClean="0"/>
+              <a:rPr lang="en-US"/>
               <a:t>Click to edit Master title style</a:t>
             </a:r>
-            <a:endParaRPr lang="en-US"/>
           </a:p>
         </p:txBody>
       </p:sp>
@@ -3026,38 +2918,37 @@
           <a:p>
             <a:pPr lvl="0"/>
             <a:r>
-              <a:rPr lang="en-US" smtClean="0"/>
+              <a:rPr lang="en-US"/>
               <a:t>Click to edit Master text styles</a:t>
             </a:r>
           </a:p>
           <a:p>
             <a:pPr lvl="1"/>
             <a:r>
-              <a:rPr lang="en-US" smtClean="0"/>
+              <a:rPr lang="en-US"/>
               <a:t>Second level</a:t>
             </a:r>
           </a:p>
           <a:p>
             <a:pPr lvl="2"/>
             <a:r>
-              <a:rPr lang="en-US" smtClean="0"/>
+              <a:rPr lang="en-US"/>
               <a:t>Third level</a:t>
             </a:r>
           </a:p>
           <a:p>
             <a:pPr lvl="3"/>
             <a:r>
-              <a:rPr lang="en-US" smtClean="0"/>
+              <a:rPr lang="en-US"/>
               <a:t>Fourth level</a:t>
             </a:r>
           </a:p>
           <a:p>
             <a:pPr lvl="4"/>
             <a:r>
-              <a:rPr lang="en-US" smtClean="0"/>
+              <a:rPr lang="en-US"/>
               <a:t>Fifth level</a:t>
             </a:r>
-            <a:endParaRPr lang="en-US"/>
           </a:p>
         </p:txBody>
       </p:sp>
@@ -3111,38 +3002,37 @@
           <a:p>
             <a:pPr lvl="0"/>
             <a:r>
-              <a:rPr lang="en-US" smtClean="0"/>
+              <a:rPr lang="en-US"/>
               <a:t>Click to edit Master text styles</a:t>
             </a:r>
           </a:p>
           <a:p>
             <a:pPr lvl="1"/>
             <a:r>
-              <a:rPr lang="en-US" smtClean="0"/>
+              <a:rPr lang="en-US"/>
               <a:t>Second level</a:t>
             </a:r>
           </a:p>
           <a:p>
             <a:pPr lvl="2"/>
             <a:r>
-              <a:rPr lang="en-US" smtClean="0"/>
+              <a:rPr lang="en-US"/>
               <a:t>Third level</a:t>
             </a:r>
           </a:p>
           <a:p>
             <a:pPr lvl="3"/>
             <a:r>
-              <a:rPr lang="en-US" smtClean="0"/>
+              <a:rPr lang="en-US"/>
               <a:t>Fourth level</a:t>
             </a:r>
           </a:p>
           <a:p>
             <a:pPr lvl="4"/>
             <a:r>
-              <a:rPr lang="en-US" smtClean="0"/>
+              <a:rPr lang="en-US"/>
               <a:t>Fifth level</a:t>
             </a:r>
-            <a:endParaRPr lang="en-US"/>
           </a:p>
         </p:txBody>
       </p:sp>
@@ -3163,7 +3053,7 @@
           <a:p>
             <a:fld id="{5BCAD085-E8A6-8845-BD4E-CB4CCA059FC4}" type="datetimeFigureOut">
               <a:rPr lang="en-US" smtClean="0"/>
-              <a:t>1/27/13</a:t>
+              <a:t>7/2/26</a:t>
             </a:fld>
             <a:endParaRPr lang="en-US"/>
           </a:p>
@@ -3261,10 +3151,9 @@
           </a:lstStyle>
           <a:p>
             <a:r>
-              <a:rPr lang="en-US" smtClean="0"/>
+              <a:rPr lang="en-US"/>
               <a:t>Click to edit Master title style</a:t>
             </a:r>
-            <a:endParaRPr lang="en-US"/>
           </a:p>
         </p:txBody>
       </p:sp>
@@ -3327,7 +3216,7 @@
           <a:p>
             <a:pPr lvl="0"/>
             <a:r>
-              <a:rPr lang="en-US" smtClean="0"/>
+              <a:rPr lang="en-US"/>
               <a:t>Click to edit Master text styles</a:t>
             </a:r>
           </a:p>
@@ -3383,38 +3272,37 @@
           <a:p>
             <a:pPr lvl="0"/>
             <a:r>
-              <a:rPr lang="en-US" smtClean="0"/>
+              <a:rPr lang="en-US"/>
               <a:t>Click to edit Master text styles</a:t>
             </a:r>
           </a:p>
           <a:p>
             <a:pPr lvl="1"/>
             <a:r>
-              <a:rPr lang="en-US" smtClean="0"/>
+              <a:rPr lang="en-US"/>
               <a:t>Second level</a:t>
             </a:r>
           </a:p>
           <a:p>
             <a:pPr lvl="2"/>
             <a:r>
-              <a:rPr lang="en-US" smtClean="0"/>
+              <a:rPr lang="en-US"/>
               <a:t>Third level</a:t>
             </a:r>
           </a:p>
           <a:p>
             <a:pPr lvl="3"/>
             <a:r>
-              <a:rPr lang="en-US" smtClean="0"/>
+              <a:rPr lang="en-US"/>
               <a:t>Fourth level</a:t>
             </a:r>
           </a:p>
           <a:p>
             <a:pPr lvl="4"/>
             <a:r>
-              <a:rPr lang="en-US" smtClean="0"/>
+              <a:rPr lang="en-US"/>
               <a:t>Fifth level</a:t>
             </a:r>
-            <a:endParaRPr lang="en-US"/>
           </a:p>
         </p:txBody>
       </p:sp>
@@ -3477,7 +3365,7 @@
           <a:p>
             <a:pPr lvl="0"/>
             <a:r>
-              <a:rPr lang="en-US" smtClean="0"/>
+              <a:rPr lang="en-US"/>
               <a:t>Click to edit Master text styles</a:t>
             </a:r>
           </a:p>
@@ -3533,38 +3421,37 @@
           <a:p>
             <a:pPr lvl="0"/>
             <a:r>
-              <a:rPr lang="en-US" smtClean="0"/>
+              <a:rPr lang="en-US"/>
               <a:t>Click to edit Master text styles</a:t>
             </a:r>
           </a:p>
           <a:p>
             <a:pPr lvl="1"/>
             <a:r>
-              <a:rPr lang="en-US" smtClean="0"/>
+              <a:rPr lang="en-US"/>
               <a:t>Second level</a:t>
             </a:r>
           </a:p>
           <a:p>
             <a:pPr lvl="2"/>
             <a:r>
-              <a:rPr lang="en-US" smtClean="0"/>
+              <a:rPr lang="en-US"/>
               <a:t>Third level</a:t>
             </a:r>
           </a:p>
           <a:p>
             <a:pPr lvl="3"/>
             <a:r>
-              <a:rPr lang="en-US" smtClean="0"/>
+              <a:rPr lang="en-US"/>
               <a:t>Fourth level</a:t>
             </a:r>
           </a:p>
           <a:p>
             <a:pPr lvl="4"/>
             <a:r>
-              <a:rPr lang="en-US" smtClean="0"/>
+              <a:rPr lang="en-US"/>
               <a:t>Fifth level</a:t>
             </a:r>
-            <a:endParaRPr lang="en-US"/>
           </a:p>
         </p:txBody>
       </p:sp>
@@ -3585,7 +3472,7 @@
           <a:p>
             <a:fld id="{5BCAD085-E8A6-8845-BD4E-CB4CCA059FC4}" type="datetimeFigureOut">
               <a:rPr lang="en-US" smtClean="0"/>
-              <a:t>1/27/13</a:t>
+              <a:t>7/2/26</a:t>
             </a:fld>
             <a:endParaRPr lang="en-US"/>
           </a:p>
@@ -3679,10 +3566,9 @@
           <a:lstStyle/>
           <a:p>
             <a:r>
-              <a:rPr lang="en-US" smtClean="0"/>
+              <a:rPr lang="en-US"/>
               <a:t>Click to edit Master title style</a:t>
             </a:r>
-            <a:endParaRPr lang="en-US"/>
           </a:p>
         </p:txBody>
       </p:sp>
@@ -3703,7 +3589,7 @@
           <a:p>
             <a:fld id="{5BCAD085-E8A6-8845-BD4E-CB4CCA059FC4}" type="datetimeFigureOut">
               <a:rPr lang="en-US" smtClean="0"/>
-              <a:t>1/27/13</a:t>
+              <a:t>7/2/26</a:t>
             </a:fld>
             <a:endParaRPr lang="en-US"/>
           </a:p>
@@ -3798,7 +3684,7 @@
           <a:p>
             <a:fld id="{5BCAD085-E8A6-8845-BD4E-CB4CCA059FC4}" type="datetimeFigureOut">
               <a:rPr lang="en-US" smtClean="0"/>
-              <a:t>1/27/13</a:t>
+              <a:t>7/2/26</a:t>
             </a:fld>
             <a:endParaRPr lang="en-US"/>
           </a:p>
@@ -3901,10 +3787,9 @@
           </a:lstStyle>
           <a:p>
             <a:r>
-              <a:rPr lang="en-US" smtClean="0"/>
+              <a:rPr lang="en-US"/>
               <a:t>Click to edit Master title style</a:t>
             </a:r>
-            <a:endParaRPr lang="en-US"/>
           </a:p>
         </p:txBody>
       </p:sp>
@@ -3958,38 +3843,37 @@
           <a:p>
             <a:pPr lvl="0"/>
             <a:r>
-              <a:rPr lang="en-US" smtClean="0"/>
+              <a:rPr lang="en-US"/>
               <a:t>Click to edit Master text styles</a:t>
             </a:r>
           </a:p>
           <a:p>
             <a:pPr lvl="1"/>
             <a:r>
-              <a:rPr lang="en-US" smtClean="0"/>
+              <a:rPr lang="en-US"/>
               <a:t>Second level</a:t>
             </a:r>
           </a:p>
           <a:p>
             <a:pPr lvl="2"/>
             <a:r>
-              <a:rPr lang="en-US" smtClean="0"/>
+              <a:rPr lang="en-US"/>
               <a:t>Third level</a:t>
             </a:r>
           </a:p>
           <a:p>
             <a:pPr lvl="3"/>
             <a:r>
-              <a:rPr lang="en-US" smtClean="0"/>
+              <a:rPr lang="en-US"/>
               <a:t>Fourth level</a:t>
             </a:r>
           </a:p>
           <a:p>
             <a:pPr lvl="4"/>
             <a:r>
-              <a:rPr lang="en-US" smtClean="0"/>
+              <a:rPr lang="en-US"/>
               <a:t>Fifth level</a:t>
             </a:r>
-            <a:endParaRPr lang="en-US"/>
           </a:p>
         </p:txBody>
       </p:sp>
@@ -4052,7 +3936,7 @@
           <a:p>
             <a:pPr lvl="0"/>
             <a:r>
-              <a:rPr lang="en-US" smtClean="0"/>
+              <a:rPr lang="en-US"/>
               <a:t>Click to edit Master text styles</a:t>
             </a:r>
           </a:p>
@@ -4075,7 +3959,7 @@
           <a:p>
             <a:fld id="{5BCAD085-E8A6-8845-BD4E-CB4CCA059FC4}" type="datetimeFigureOut">
               <a:rPr lang="en-US" smtClean="0"/>
-              <a:t>1/27/13</a:t>
+              <a:t>7/2/26</a:t>
             </a:fld>
             <a:endParaRPr lang="en-US"/>
           </a:p>
@@ -4178,10 +4062,9 @@
           </a:lstStyle>
           <a:p>
             <a:r>
-              <a:rPr lang="en-US" smtClean="0"/>
+              <a:rPr lang="en-US"/>
               <a:t>Click to edit Master title style</a:t>
             </a:r>
-            <a:endParaRPr lang="en-US"/>
           </a:p>
         </p:txBody>
       </p:sp>
@@ -4305,7 +4188,7 @@
           <a:p>
             <a:pPr lvl="0"/>
             <a:r>
-              <a:rPr lang="en-US" smtClean="0"/>
+              <a:rPr lang="en-US"/>
               <a:t>Click to edit Master text styles</a:t>
             </a:r>
           </a:p>
@@ -4328,7 +4211,7 @@
           <a:p>
             <a:fld id="{5BCAD085-E8A6-8845-BD4E-CB4CCA059FC4}" type="datetimeFigureOut">
               <a:rPr lang="en-US" smtClean="0"/>
-              <a:t>1/27/13</a:t>
+              <a:t>7/2/26</a:t>
             </a:fld>
             <a:endParaRPr lang="en-US"/>
           </a:p>
@@ -4437,10 +4320,9 @@
           <a:lstStyle/>
           <a:p>
             <a:r>
-              <a:rPr lang="en-US" smtClean="0"/>
+              <a:rPr lang="en-US"/>
               <a:t>Click to edit Master title style</a:t>
             </a:r>
-            <a:endParaRPr lang="en-US"/>
           </a:p>
         </p:txBody>
       </p:sp>
@@ -4471,38 +4353,37 @@
           <a:p>
             <a:pPr lvl="0"/>
             <a:r>
-              <a:rPr lang="en-US" smtClean="0"/>
+              <a:rPr lang="en-US"/>
               <a:t>Click to edit Master text styles</a:t>
             </a:r>
           </a:p>
           <a:p>
             <a:pPr lvl="1"/>
             <a:r>
-              <a:rPr lang="en-US" smtClean="0"/>
+              <a:rPr lang="en-US"/>
               <a:t>Second level</a:t>
             </a:r>
           </a:p>
           <a:p>
             <a:pPr lvl="2"/>
             <a:r>
-              <a:rPr lang="en-US" smtClean="0"/>
+              <a:rPr lang="en-US"/>
               <a:t>Third level</a:t>
             </a:r>
           </a:p>
           <a:p>
             <a:pPr lvl="3"/>
             <a:r>
-              <a:rPr lang="en-US" smtClean="0"/>
+              <a:rPr lang="en-US"/>
               <a:t>Fourth level</a:t>
             </a:r>
           </a:p>
           <a:p>
             <a:pPr lvl="4"/>
             <a:r>
-              <a:rPr lang="en-US" smtClean="0"/>
+              <a:rPr lang="en-US"/>
               <a:t>Fifth level</a:t>
             </a:r>
-            <a:endParaRPr lang="en-US"/>
           </a:p>
         </p:txBody>
       </p:sp>
@@ -4541,7 +4422,7 @@
           <a:p>
             <a:fld id="{5BCAD085-E8A6-8845-BD4E-CB4CCA059FC4}" type="datetimeFigureOut">
               <a:rPr lang="en-US" smtClean="0"/>
-              <a:t>1/27/13</a:t>
+              <a:t>7/2/26</a:t>
             </a:fld>
             <a:endParaRPr lang="en-US"/>
           </a:p>
@@ -4900,7 +4781,7 @@
 </file>
 
 <file path=ppt/slides/slide1.xml><?xml version="1.0" encoding="utf-8"?>
-<p:sld xmlns:a="http://schemas.openxmlformats.org/drawingml/2006/main" xmlns:p="http://schemas.openxmlformats.org/presentationml/2006/main" xmlns:r="http://schemas.openxmlformats.org/officeDocument/2006/relationships">
+<p:sld xmlns:a="http://schemas.openxmlformats.org/drawingml/2006/main" xmlns:r="http://schemas.openxmlformats.org/officeDocument/2006/relationships" xmlns:p="http://schemas.openxmlformats.org/presentationml/2006/main">
   <p:cSld>
     <p:bg>
       <p:bgPr>
@@ -4916,7 +4797,14 @@
         <p:cNvGrpSpPr/>
         <p:nvPr/>
       </p:nvGrpSpPr>
-      <p:grpSpPr/>
+      <p:grpSpPr>
+        <a:xfrm>
+          <a:off x="0" y="0"/>
+          <a:ext cx="0" cy="0"/>
+          <a:chOff x="0" y="0"/>
+          <a:chExt cx="0" cy="0"/>
+        </a:xfrm>
+      </p:grpSpPr>
       <p:sp>
         <p:nvSpPr>
           <p:cNvPr id="2" name="Rectangle 1"/>
@@ -4957,6 +4845,7 @@
           <a:lstStyle/>
           <a:p>
             <a:pPr algn="ctr"/>
+            <a:endParaRPr/>
           </a:p>
         </p:txBody>
       </p:sp>
@@ -4968,7 +4857,7 @@
         </p:nvSpPr>
         <p:spPr>
           <a:xfrm>
-            <a:off x="1463040" y="1371600"/>
+            <a:off x="1261872" y="1005840"/>
             <a:ext cx="5486400" cy="822960"/>
           </a:xfrm>
           <a:prstGeom prst="rect">
@@ -4984,7 +4873,7 @@
           <a:p>
             <a:pPr algn="l"/>
             <a:r>
-              <a:rPr sz="7200" b="1">
+              <a:rPr sz="7200" b="1" dirty="0" err="1">
                 <a:solidFill>
                   <a:srgbClr val="FF1585"/>
                 </a:solidFill>
@@ -4993,7 +4882,7 @@
               <a:t>one</a:t>
             </a:r>
             <a:r>
-              <a:rPr sz="7200" b="1">
+              <a:rPr sz="7200" b="1" dirty="0" err="1">
                 <a:solidFill>
                   <a:srgbClr val="FFFFFF"/>
                 </a:solidFill>
@@ -5001,6 +4890,12 @@
               </a:rPr>
               <a:t>member</a:t>
             </a:r>
+            <a:endParaRPr sz="7200" b="1" dirty="0">
+              <a:solidFill>
+                <a:srgbClr val="FFFFFF"/>
+              </a:solidFill>
+              <a:latin typeface="Arial"/>
+            </a:endParaRPr>
           </a:p>
         </p:txBody>
       </p:sp>
@@ -5044,6 +4939,7 @@
           <a:lstStyle/>
           <a:p>
             <a:pPr algn="ctr"/>
+            <a:endParaRPr/>
           </a:p>
         </p:txBody>
       </p:sp>
@@ -5122,6 +5018,7 @@
           <a:lstStyle/>
           <a:p>
             <a:pPr algn="ctr"/>
+            <a:endParaRPr/>
           </a:p>
         </p:txBody>
       </p:sp>
@@ -5235,6 +5132,7 @@
           <a:lstStyle/>
           <a:p>
             <a:pPr algn="ctr"/>
+            <a:endParaRPr/>
           </a:p>
         </p:txBody>
       </p:sp>
@@ -5313,6 +5211,7 @@
           <a:lstStyle/>
           <a:p>
             <a:pPr algn="ctr"/>
+            <a:endParaRPr/>
           </a:p>
         </p:txBody>
       </p:sp>
@@ -5391,6 +5290,7 @@
           <a:lstStyle/>
           <a:p>
             <a:pPr algn="ctr"/>
+            <a:endParaRPr/>
           </a:p>
         </p:txBody>
       </p:sp>
@@ -5469,6 +5369,7 @@
           <a:lstStyle/>
           <a:p>
             <a:pPr algn="ctr"/>
+            <a:endParaRPr/>
           </a:p>
         </p:txBody>
       </p:sp>
@@ -5551,7 +5452,7 @@
 </file>
 
 <file path=ppt/slides/slide10.xml><?xml version="1.0" encoding="utf-8"?>
-<p:sld xmlns:a="http://schemas.openxmlformats.org/drawingml/2006/main" xmlns:p="http://schemas.openxmlformats.org/presentationml/2006/main" xmlns:r="http://schemas.openxmlformats.org/officeDocument/2006/relationships">
+<p:sld xmlns:a="http://schemas.openxmlformats.org/drawingml/2006/main" xmlns:r="http://schemas.openxmlformats.org/officeDocument/2006/relationships" xmlns:p="http://schemas.openxmlformats.org/presentationml/2006/main">
   <p:cSld>
     <p:bg>
       <p:bgPr>
@@ -5567,7 +5468,14 @@
         <p:cNvGrpSpPr/>
         <p:nvPr/>
       </p:nvGrpSpPr>
-      <p:grpSpPr/>
+      <p:grpSpPr>
+        <a:xfrm>
+          <a:off x="0" y="0"/>
+          <a:ext cx="0" cy="0"/>
+          <a:chOff x="0" y="0"/>
+          <a:chExt cx="0" cy="0"/>
+        </a:xfrm>
+      </p:grpSpPr>
       <p:sp>
         <p:nvSpPr>
           <p:cNvPr id="2" name="Rectangle 1"/>
@@ -5608,6 +5516,7 @@
           <a:lstStyle/>
           <a:p>
             <a:pPr algn="ctr"/>
+            <a:endParaRPr/>
           </a:p>
         </p:txBody>
       </p:sp>
@@ -5651,6 +5560,7 @@
           <a:lstStyle/>
           <a:p>
             <a:pPr algn="ctr"/>
+            <a:endParaRPr/>
           </a:p>
         </p:txBody>
       </p:sp>
@@ -5765,6 +5675,7 @@
           <a:lstStyle/>
           <a:p>
             <a:pPr algn="ctr"/>
+            <a:endParaRPr/>
           </a:p>
         </p:txBody>
       </p:sp>
@@ -5808,6 +5719,7 @@
           <a:lstStyle/>
           <a:p>
             <a:pPr algn="ctr"/>
+            <a:endParaRPr/>
           </a:p>
         </p:txBody>
       </p:sp>
@@ -5886,6 +5798,7 @@
           <a:lstStyle/>
           <a:p>
             <a:pPr algn="ctr"/>
+            <a:endParaRPr/>
           </a:p>
         </p:txBody>
       </p:sp>
@@ -5965,6 +5878,7 @@
           <a:lstStyle/>
           <a:p>
             <a:pPr algn="ctr"/>
+            <a:endParaRPr/>
           </a:p>
         </p:txBody>
       </p:sp>
@@ -6008,6 +5922,7 @@
           <a:lstStyle/>
           <a:p>
             <a:pPr algn="ctr"/>
+            <a:endParaRPr/>
           </a:p>
         </p:txBody>
       </p:sp>
@@ -6086,6 +6001,7 @@
           <a:lstStyle/>
           <a:p>
             <a:pPr algn="ctr"/>
+            <a:endParaRPr/>
           </a:p>
         </p:txBody>
       </p:sp>
@@ -6165,6 +6081,7 @@
           <a:lstStyle/>
           <a:p>
             <a:pPr algn="ctr"/>
+            <a:endParaRPr/>
           </a:p>
         </p:txBody>
       </p:sp>
@@ -6208,6 +6125,7 @@
           <a:lstStyle/>
           <a:p>
             <a:pPr algn="ctr"/>
+            <a:endParaRPr/>
           </a:p>
         </p:txBody>
       </p:sp>
@@ -6286,6 +6204,7 @@
           <a:lstStyle/>
           <a:p>
             <a:pPr algn="ctr"/>
+            <a:endParaRPr/>
           </a:p>
         </p:txBody>
       </p:sp>
@@ -6365,6 +6284,7 @@
           <a:lstStyle/>
           <a:p>
             <a:pPr algn="ctr"/>
+            <a:endParaRPr/>
           </a:p>
         </p:txBody>
       </p:sp>
@@ -6408,6 +6328,7 @@
           <a:lstStyle/>
           <a:p>
             <a:pPr algn="ctr"/>
+            <a:endParaRPr/>
           </a:p>
         </p:txBody>
       </p:sp>
@@ -6486,6 +6407,7 @@
           <a:lstStyle/>
           <a:p>
             <a:pPr algn="ctr"/>
+            <a:endParaRPr/>
           </a:p>
         </p:txBody>
       </p:sp>
@@ -6565,6 +6487,7 @@
           <a:lstStyle/>
           <a:p>
             <a:pPr algn="ctr"/>
+            <a:endParaRPr/>
           </a:p>
         </p:txBody>
       </p:sp>
@@ -6608,6 +6531,7 @@
           <a:lstStyle/>
           <a:p>
             <a:pPr algn="ctr"/>
+            <a:endParaRPr/>
           </a:p>
         </p:txBody>
       </p:sp>
@@ -6686,6 +6610,7 @@
           <a:lstStyle/>
           <a:p>
             <a:pPr algn="ctr"/>
+            <a:endParaRPr/>
           </a:p>
         </p:txBody>
       </p:sp>
@@ -6765,6 +6690,7 @@
           <a:lstStyle/>
           <a:p>
             <a:pPr algn="ctr"/>
+            <a:endParaRPr/>
           </a:p>
         </p:txBody>
       </p:sp>
@@ -6808,6 +6734,7 @@
           <a:lstStyle/>
           <a:p>
             <a:pPr algn="ctr"/>
+            <a:endParaRPr/>
           </a:p>
         </p:txBody>
       </p:sp>
@@ -6886,6 +6813,7 @@
           <a:lstStyle/>
           <a:p>
             <a:pPr algn="ctr"/>
+            <a:endParaRPr/>
           </a:p>
         </p:txBody>
       </p:sp>
@@ -6969,7 +6897,7 @@
 </file>
 
 <file path=ppt/slides/slide11.xml><?xml version="1.0" encoding="utf-8"?>
-<p:sld xmlns:a="http://schemas.openxmlformats.org/drawingml/2006/main" xmlns:p="http://schemas.openxmlformats.org/presentationml/2006/main" xmlns:r="http://schemas.openxmlformats.org/officeDocument/2006/relationships">
+<p:sld xmlns:a="http://schemas.openxmlformats.org/drawingml/2006/main" xmlns:r="http://schemas.openxmlformats.org/officeDocument/2006/relationships" xmlns:p="http://schemas.openxmlformats.org/presentationml/2006/main">
   <p:cSld>
     <p:bg>
       <p:bgPr>
@@ -6985,7 +6913,14 @@
         <p:cNvGrpSpPr/>
         <p:nvPr/>
       </p:nvGrpSpPr>
-      <p:grpSpPr/>
+      <p:grpSpPr>
+        <a:xfrm>
+          <a:off x="0" y="0"/>
+          <a:ext cx="0" cy="0"/>
+          <a:chOff x="0" y="0"/>
+          <a:chExt cx="0" cy="0"/>
+        </a:xfrm>
+      </p:grpSpPr>
       <p:sp>
         <p:nvSpPr>
           <p:cNvPr id="2" name="Rectangle 1"/>
@@ -7026,6 +6961,7 @@
           <a:lstStyle/>
           <a:p>
             <a:pPr algn="ctr"/>
+            <a:endParaRPr/>
           </a:p>
         </p:txBody>
       </p:sp>
@@ -7069,6 +7005,7 @@
           <a:lstStyle/>
           <a:p>
             <a:pPr algn="ctr"/>
+            <a:endParaRPr/>
           </a:p>
         </p:txBody>
       </p:sp>
@@ -7182,6 +7119,7 @@
           <a:lstStyle/>
           <a:p>
             <a:pPr algn="ctr"/>
+            <a:endParaRPr/>
           </a:p>
         </p:txBody>
       </p:sp>
@@ -7225,6 +7163,7 @@
           <a:lstStyle/>
           <a:p>
             <a:pPr algn="ctr"/>
+            <a:endParaRPr/>
           </a:p>
         </p:txBody>
       </p:sp>
@@ -7339,6 +7278,7 @@
           <a:lstStyle/>
           <a:p>
             <a:pPr algn="ctr"/>
+            <a:endParaRPr/>
           </a:p>
         </p:txBody>
       </p:sp>
@@ -7417,6 +7357,7 @@
           <a:lstStyle/>
           <a:p>
             <a:pPr algn="ctr"/>
+            <a:endParaRPr/>
           </a:p>
         </p:txBody>
       </p:sp>
@@ -7531,6 +7472,7 @@
           <a:lstStyle/>
           <a:p>
             <a:pPr algn="ctr"/>
+            <a:endParaRPr/>
           </a:p>
         </p:txBody>
       </p:sp>
@@ -7645,6 +7587,7 @@
           <a:lstStyle/>
           <a:p>
             <a:pPr algn="ctr"/>
+            <a:endParaRPr/>
           </a:p>
         </p:txBody>
       </p:sp>
@@ -7759,6 +7702,7 @@
           <a:lstStyle/>
           <a:p>
             <a:pPr algn="ctr"/>
+            <a:endParaRPr/>
           </a:p>
         </p:txBody>
       </p:sp>
@@ -7873,6 +7817,7 @@
           <a:lstStyle/>
           <a:p>
             <a:pPr algn="ctr"/>
+            <a:endParaRPr/>
           </a:p>
         </p:txBody>
       </p:sp>
@@ -7987,6 +7932,7 @@
           <a:lstStyle/>
           <a:p>
             <a:pPr algn="ctr"/>
+            <a:endParaRPr/>
           </a:p>
         </p:txBody>
       </p:sp>
@@ -8101,6 +8047,7 @@
           <a:lstStyle/>
           <a:p>
             <a:pPr algn="ctr"/>
+            <a:endParaRPr/>
           </a:p>
         </p:txBody>
       </p:sp>
@@ -8219,7 +8166,7 @@
 </file>
 
 <file path=ppt/slides/slide12.xml><?xml version="1.0" encoding="utf-8"?>
-<p:sld xmlns:a="http://schemas.openxmlformats.org/drawingml/2006/main" xmlns:p="http://schemas.openxmlformats.org/presentationml/2006/main" xmlns:r="http://schemas.openxmlformats.org/officeDocument/2006/relationships">
+<p:sld xmlns:a="http://schemas.openxmlformats.org/drawingml/2006/main" xmlns:r="http://schemas.openxmlformats.org/officeDocument/2006/relationships" xmlns:p="http://schemas.openxmlformats.org/presentationml/2006/main">
   <p:cSld>
     <p:bg>
       <p:bgPr>
@@ -8235,7 +8182,14 @@
         <p:cNvGrpSpPr/>
         <p:nvPr/>
       </p:nvGrpSpPr>
-      <p:grpSpPr/>
+      <p:grpSpPr>
+        <a:xfrm>
+          <a:off x="0" y="0"/>
+          <a:ext cx="0" cy="0"/>
+          <a:chOff x="0" y="0"/>
+          <a:chExt cx="0" cy="0"/>
+        </a:xfrm>
+      </p:grpSpPr>
       <p:sp>
         <p:nvSpPr>
           <p:cNvPr id="2" name="Rectangle 1"/>
@@ -8276,6 +8230,7 @@
           <a:lstStyle/>
           <a:p>
             <a:pPr algn="ctr"/>
+            <a:endParaRPr/>
           </a:p>
         </p:txBody>
       </p:sp>
@@ -8319,6 +8274,7 @@
           <a:lstStyle/>
           <a:p>
             <a:pPr algn="ctr"/>
+            <a:endParaRPr/>
           </a:p>
         </p:txBody>
       </p:sp>
@@ -8432,6 +8388,7 @@
           <a:lstStyle/>
           <a:p>
             <a:pPr algn="ctr"/>
+            <a:endParaRPr/>
           </a:p>
         </p:txBody>
       </p:sp>
@@ -8475,6 +8432,7 @@
           <a:lstStyle/>
           <a:p>
             <a:pPr algn="ctr"/>
+            <a:endParaRPr/>
           </a:p>
         </p:txBody>
       </p:sp>
@@ -8588,6 +8546,7 @@
           <a:lstStyle/>
           <a:p>
             <a:pPr algn="ctr"/>
+            <a:endParaRPr/>
           </a:p>
         </p:txBody>
       </p:sp>
@@ -8667,6 +8626,7 @@
           <a:lstStyle/>
           <a:p>
             <a:pPr algn="ctr"/>
+            <a:endParaRPr/>
           </a:p>
         </p:txBody>
       </p:sp>
@@ -8710,6 +8670,7 @@
           <a:lstStyle/>
           <a:p>
             <a:pPr algn="ctr"/>
+            <a:endParaRPr/>
           </a:p>
         </p:txBody>
       </p:sp>
@@ -8823,6 +8784,7 @@
           <a:lstStyle/>
           <a:p>
             <a:pPr algn="ctr"/>
+            <a:endParaRPr/>
           </a:p>
         </p:txBody>
       </p:sp>
@@ -8902,6 +8864,7 @@
           <a:lstStyle/>
           <a:p>
             <a:pPr algn="ctr"/>
+            <a:endParaRPr/>
           </a:p>
         </p:txBody>
       </p:sp>
@@ -8945,6 +8908,7 @@
           <a:lstStyle/>
           <a:p>
             <a:pPr algn="ctr"/>
+            <a:endParaRPr/>
           </a:p>
         </p:txBody>
       </p:sp>
@@ -9058,6 +9022,7 @@
           <a:lstStyle/>
           <a:p>
             <a:pPr algn="ctr"/>
+            <a:endParaRPr/>
           </a:p>
         </p:txBody>
       </p:sp>
@@ -9137,6 +9102,7 @@
           <a:lstStyle/>
           <a:p>
             <a:pPr algn="ctr"/>
+            <a:endParaRPr/>
           </a:p>
         </p:txBody>
       </p:sp>
@@ -9180,6 +9146,7 @@
           <a:lstStyle/>
           <a:p>
             <a:pPr algn="ctr"/>
+            <a:endParaRPr/>
           </a:p>
         </p:txBody>
       </p:sp>
@@ -9293,6 +9260,7 @@
           <a:lstStyle/>
           <a:p>
             <a:pPr algn="ctr"/>
+            <a:endParaRPr/>
           </a:p>
         </p:txBody>
       </p:sp>
@@ -9372,6 +9340,7 @@
           <a:lstStyle/>
           <a:p>
             <a:pPr algn="ctr"/>
+            <a:endParaRPr/>
           </a:p>
         </p:txBody>
       </p:sp>
@@ -9415,6 +9384,7 @@
           <a:lstStyle/>
           <a:p>
             <a:pPr algn="ctr"/>
+            <a:endParaRPr/>
           </a:p>
         </p:txBody>
       </p:sp>
@@ -9528,6 +9498,7 @@
           <a:lstStyle/>
           <a:p>
             <a:pPr algn="ctr"/>
+            <a:endParaRPr/>
           </a:p>
         </p:txBody>
       </p:sp>
@@ -9607,6 +9578,7 @@
           <a:lstStyle/>
           <a:p>
             <a:pPr algn="ctr"/>
+            <a:endParaRPr/>
           </a:p>
         </p:txBody>
       </p:sp>
@@ -9650,6 +9622,7 @@
           <a:lstStyle/>
           <a:p>
             <a:pPr algn="ctr"/>
+            <a:endParaRPr/>
           </a:p>
         </p:txBody>
       </p:sp>
@@ -9763,6 +9736,7 @@
           <a:lstStyle/>
           <a:p>
             <a:pPr algn="ctr"/>
+            <a:endParaRPr/>
           </a:p>
         </p:txBody>
       </p:sp>
@@ -9811,7 +9785,7 @@
 </file>
 
 <file path=ppt/slides/slide13.xml><?xml version="1.0" encoding="utf-8"?>
-<p:sld xmlns:a="http://schemas.openxmlformats.org/drawingml/2006/main" xmlns:p="http://schemas.openxmlformats.org/presentationml/2006/main" xmlns:r="http://schemas.openxmlformats.org/officeDocument/2006/relationships">
+<p:sld xmlns:a="http://schemas.openxmlformats.org/drawingml/2006/main" xmlns:r="http://schemas.openxmlformats.org/officeDocument/2006/relationships" xmlns:p="http://schemas.openxmlformats.org/presentationml/2006/main">
   <p:cSld>
     <p:bg>
       <p:bgPr>
@@ -9827,7 +9801,14 @@
         <p:cNvGrpSpPr/>
         <p:nvPr/>
       </p:nvGrpSpPr>
-      <p:grpSpPr/>
+      <p:grpSpPr>
+        <a:xfrm>
+          <a:off x="0" y="0"/>
+          <a:ext cx="0" cy="0"/>
+          <a:chOff x="0" y="0"/>
+          <a:chExt cx="0" cy="0"/>
+        </a:xfrm>
+      </p:grpSpPr>
       <p:sp>
         <p:nvSpPr>
           <p:cNvPr id="2" name="Rectangle 1"/>
@@ -9868,6 +9849,7 @@
           <a:lstStyle/>
           <a:p>
             <a:pPr algn="ctr"/>
+            <a:endParaRPr/>
           </a:p>
         </p:txBody>
       </p:sp>
@@ -9911,6 +9893,7 @@
           <a:lstStyle/>
           <a:p>
             <a:pPr algn="ctr"/>
+            <a:endParaRPr/>
           </a:p>
         </p:txBody>
       </p:sp>
@@ -10068,6 +10051,7 @@
           <a:lstStyle/>
           <a:p>
             <a:pPr algn="ctr"/>
+            <a:endParaRPr/>
           </a:p>
         </p:txBody>
       </p:sp>
@@ -10111,6 +10095,7 @@
           <a:lstStyle/>
           <a:p>
             <a:pPr algn="ctr"/>
+            <a:endParaRPr/>
           </a:p>
         </p:txBody>
       </p:sp>
@@ -10189,6 +10174,7 @@
           <a:lstStyle/>
           <a:p>
             <a:pPr algn="ctr"/>
+            <a:endParaRPr/>
           </a:p>
         </p:txBody>
       </p:sp>
@@ -10268,6 +10254,7 @@
           <a:lstStyle/>
           <a:p>
             <a:pPr algn="ctr"/>
+            <a:endParaRPr/>
           </a:p>
         </p:txBody>
       </p:sp>
@@ -10346,6 +10333,7 @@
           <a:lstStyle/>
           <a:p>
             <a:pPr algn="ctr"/>
+            <a:endParaRPr/>
           </a:p>
         </p:txBody>
       </p:sp>
@@ -10425,6 +10413,7 @@
           <a:lstStyle/>
           <a:p>
             <a:pPr algn="ctr"/>
+            <a:endParaRPr/>
           </a:p>
         </p:txBody>
       </p:sp>
@@ -10503,6 +10492,7 @@
           <a:lstStyle/>
           <a:p>
             <a:pPr algn="ctr"/>
+            <a:endParaRPr/>
           </a:p>
         </p:txBody>
       </p:sp>
@@ -10586,7 +10576,7 @@
 </file>
 
 <file path=ppt/slides/slide2.xml><?xml version="1.0" encoding="utf-8"?>
-<p:sld xmlns:a="http://schemas.openxmlformats.org/drawingml/2006/main" xmlns:p="http://schemas.openxmlformats.org/presentationml/2006/main" xmlns:r="http://schemas.openxmlformats.org/officeDocument/2006/relationships">
+<p:sld xmlns:a="http://schemas.openxmlformats.org/drawingml/2006/main" xmlns:r="http://schemas.openxmlformats.org/officeDocument/2006/relationships" xmlns:p="http://schemas.openxmlformats.org/presentationml/2006/main">
   <p:cSld>
     <p:bg>
       <p:bgPr>
@@ -10602,7 +10592,14 @@
         <p:cNvGrpSpPr/>
         <p:nvPr/>
       </p:nvGrpSpPr>
-      <p:grpSpPr/>
+      <p:grpSpPr>
+        <a:xfrm>
+          <a:off x="0" y="0"/>
+          <a:ext cx="0" cy="0"/>
+          <a:chOff x="0" y="0"/>
+          <a:chExt cx="0" cy="0"/>
+        </a:xfrm>
+      </p:grpSpPr>
       <p:sp>
         <p:nvSpPr>
           <p:cNvPr id="2" name="Rectangle 1"/>
@@ -10643,6 +10640,7 @@
           <a:lstStyle/>
           <a:p>
             <a:pPr algn="ctr"/>
+            <a:endParaRPr/>
           </a:p>
         </p:txBody>
       </p:sp>
@@ -10686,6 +10684,7 @@
           <a:lstStyle/>
           <a:p>
             <a:pPr algn="ctr"/>
+            <a:endParaRPr/>
           </a:p>
         </p:txBody>
       </p:sp>
@@ -10915,6 +10914,7 @@
           <a:lstStyle/>
           <a:p>
             <a:pPr algn="ctr"/>
+            <a:endParaRPr/>
           </a:p>
         </p:txBody>
       </p:sp>
@@ -10958,6 +10958,7 @@
           <a:lstStyle/>
           <a:p>
             <a:pPr algn="ctr"/>
+            <a:endParaRPr/>
           </a:p>
         </p:txBody>
       </p:sp>
@@ -11036,6 +11037,7 @@
           <a:lstStyle/>
           <a:p>
             <a:pPr algn="ctr"/>
+            <a:endParaRPr/>
           </a:p>
         </p:txBody>
       </p:sp>
@@ -11115,6 +11117,7 @@
           <a:lstStyle/>
           <a:p>
             <a:pPr algn="ctr"/>
+            <a:endParaRPr/>
           </a:p>
         </p:txBody>
       </p:sp>
@@ -11158,6 +11161,7 @@
           <a:lstStyle/>
           <a:p>
             <a:pPr algn="ctr"/>
+            <a:endParaRPr/>
           </a:p>
         </p:txBody>
       </p:sp>
@@ -11236,6 +11240,7 @@
           <a:lstStyle/>
           <a:p>
             <a:pPr algn="ctr"/>
+            <a:endParaRPr/>
           </a:p>
         </p:txBody>
       </p:sp>
@@ -11315,6 +11320,7 @@
           <a:lstStyle/>
           <a:p>
             <a:pPr algn="ctr"/>
+            <a:endParaRPr/>
           </a:p>
         </p:txBody>
       </p:sp>
@@ -11358,6 +11364,7 @@
           <a:lstStyle/>
           <a:p>
             <a:pPr algn="ctr"/>
+            <a:endParaRPr/>
           </a:p>
         </p:txBody>
       </p:sp>
@@ -11436,6 +11443,7 @@
           <a:lstStyle/>
           <a:p>
             <a:pPr algn="ctr"/>
+            <a:endParaRPr/>
           </a:p>
         </p:txBody>
       </p:sp>
@@ -11515,6 +11523,7 @@
           <a:lstStyle/>
           <a:p>
             <a:pPr algn="ctr"/>
+            <a:endParaRPr/>
           </a:p>
         </p:txBody>
       </p:sp>
@@ -11558,6 +11567,7 @@
           <a:lstStyle/>
           <a:p>
             <a:pPr algn="ctr"/>
+            <a:endParaRPr/>
           </a:p>
         </p:txBody>
       </p:sp>
@@ -11636,6 +11646,7 @@
           <a:lstStyle/>
           <a:p>
             <a:pPr algn="ctr"/>
+            <a:endParaRPr/>
           </a:p>
         </p:txBody>
       </p:sp>
@@ -11715,6 +11726,7 @@
           <a:lstStyle/>
           <a:p>
             <a:pPr algn="ctr"/>
+            <a:endParaRPr/>
           </a:p>
         </p:txBody>
       </p:sp>
@@ -11758,6 +11770,7 @@
           <a:lstStyle/>
           <a:p>
             <a:pPr algn="ctr"/>
+            <a:endParaRPr/>
           </a:p>
         </p:txBody>
       </p:sp>
@@ -11836,6 +11849,7 @@
           <a:lstStyle/>
           <a:p>
             <a:pPr algn="ctr"/>
+            <a:endParaRPr/>
           </a:p>
         </p:txBody>
       </p:sp>
@@ -11915,6 +11929,7 @@
           <a:lstStyle/>
           <a:p>
             <a:pPr algn="ctr"/>
+            <a:endParaRPr/>
           </a:p>
         </p:txBody>
       </p:sp>
@@ -11958,6 +11973,7 @@
           <a:lstStyle/>
           <a:p>
             <a:pPr algn="ctr"/>
+            <a:endParaRPr/>
           </a:p>
         </p:txBody>
       </p:sp>
@@ -12036,6 +12052,7 @@
           <a:lstStyle/>
           <a:p>
             <a:pPr algn="ctr"/>
+            <a:endParaRPr/>
           </a:p>
         </p:txBody>
       </p:sp>
@@ -12084,7 +12101,7 @@
 </file>
 
 <file path=ppt/slides/slide3.xml><?xml version="1.0" encoding="utf-8"?>
-<p:sld xmlns:a="http://schemas.openxmlformats.org/drawingml/2006/main" xmlns:p="http://schemas.openxmlformats.org/presentationml/2006/main" xmlns:r="http://schemas.openxmlformats.org/officeDocument/2006/relationships">
+<p:sld xmlns:a="http://schemas.openxmlformats.org/drawingml/2006/main" xmlns:r="http://schemas.openxmlformats.org/officeDocument/2006/relationships" xmlns:p="http://schemas.openxmlformats.org/presentationml/2006/main">
   <p:cSld>
     <p:bg>
       <p:bgPr>
@@ -12100,7 +12117,14 @@
         <p:cNvGrpSpPr/>
         <p:nvPr/>
       </p:nvGrpSpPr>
-      <p:grpSpPr/>
+      <p:grpSpPr>
+        <a:xfrm>
+          <a:off x="0" y="0"/>
+          <a:ext cx="0" cy="0"/>
+          <a:chOff x="0" y="0"/>
+          <a:chExt cx="0" cy="0"/>
+        </a:xfrm>
+      </p:grpSpPr>
       <p:sp>
         <p:nvSpPr>
           <p:cNvPr id="2" name="Rectangle 1"/>
@@ -12141,6 +12165,7 @@
           <a:lstStyle/>
           <a:p>
             <a:pPr algn="ctr"/>
+            <a:endParaRPr/>
           </a:p>
         </p:txBody>
       </p:sp>
@@ -12255,6 +12280,7 @@
           <a:lstStyle/>
           <a:p>
             <a:pPr algn="ctr"/>
+            <a:endParaRPr/>
           </a:p>
         </p:txBody>
       </p:sp>
@@ -12298,6 +12324,7 @@
           <a:lstStyle/>
           <a:p>
             <a:pPr algn="ctr"/>
+            <a:endParaRPr/>
           </a:p>
         </p:txBody>
       </p:sp>
@@ -12376,6 +12403,7 @@
           <a:lstStyle/>
           <a:p>
             <a:pPr algn="ctr"/>
+            <a:endParaRPr/>
           </a:p>
         </p:txBody>
       </p:sp>
@@ -12456,6 +12484,7 @@
           <a:lstStyle/>
           <a:p>
             <a:pPr algn="ctr"/>
+            <a:endParaRPr/>
           </a:p>
         </p:txBody>
       </p:sp>
@@ -12534,6 +12563,7 @@
           <a:lstStyle/>
           <a:p>
             <a:pPr algn="ctr"/>
+            <a:endParaRPr/>
           </a:p>
         </p:txBody>
       </p:sp>
@@ -12614,6 +12644,7 @@
           <a:lstStyle/>
           <a:p>
             <a:pPr algn="ctr"/>
+            <a:endParaRPr/>
           </a:p>
         </p:txBody>
       </p:sp>
@@ -12692,6 +12723,7 @@
           <a:lstStyle/>
           <a:p>
             <a:pPr algn="ctr"/>
+            <a:endParaRPr/>
           </a:p>
         </p:txBody>
       </p:sp>
@@ -12776,7 +12808,7 @@
 </file>
 
 <file path=ppt/slides/slide4.xml><?xml version="1.0" encoding="utf-8"?>
-<p:sld xmlns:a="http://schemas.openxmlformats.org/drawingml/2006/main" xmlns:p="http://schemas.openxmlformats.org/presentationml/2006/main" xmlns:r="http://schemas.openxmlformats.org/officeDocument/2006/relationships">
+<p:sld xmlns:a="http://schemas.openxmlformats.org/drawingml/2006/main" xmlns:r="http://schemas.openxmlformats.org/officeDocument/2006/relationships" xmlns:p="http://schemas.openxmlformats.org/presentationml/2006/main">
   <p:cSld>
     <p:bg>
       <p:bgPr>
@@ -12792,7 +12824,14 @@
         <p:cNvGrpSpPr/>
         <p:nvPr/>
       </p:nvGrpSpPr>
-      <p:grpSpPr/>
+      <p:grpSpPr>
+        <a:xfrm>
+          <a:off x="0" y="0"/>
+          <a:ext cx="0" cy="0"/>
+          <a:chOff x="0" y="0"/>
+          <a:chExt cx="0" cy="0"/>
+        </a:xfrm>
+      </p:grpSpPr>
       <p:sp>
         <p:nvSpPr>
           <p:cNvPr id="2" name="Rectangle 1"/>
@@ -12833,6 +12872,7 @@
           <a:lstStyle/>
           <a:p>
             <a:pPr algn="ctr"/>
+            <a:endParaRPr/>
           </a:p>
         </p:txBody>
       </p:sp>
@@ -12876,6 +12916,7 @@
           <a:lstStyle/>
           <a:p>
             <a:pPr algn="ctr"/>
+            <a:endParaRPr/>
           </a:p>
         </p:txBody>
       </p:sp>
@@ -13024,6 +13065,7 @@
           <a:lstStyle/>
           <a:p>
             <a:pPr algn="ctr"/>
+            <a:endParaRPr/>
           </a:p>
         </p:txBody>
       </p:sp>
@@ -13137,6 +13179,7 @@
           <a:lstStyle/>
           <a:p>
             <a:pPr algn="ctr"/>
+            <a:endParaRPr/>
           </a:p>
         </p:txBody>
       </p:sp>
@@ -13217,6 +13260,7 @@
           <a:lstStyle/>
           <a:p>
             <a:pPr algn="ctr"/>
+            <a:endParaRPr/>
           </a:p>
         </p:txBody>
       </p:sp>
@@ -13330,6 +13374,7 @@
           <a:lstStyle/>
           <a:p>
             <a:pPr algn="ctr"/>
+            <a:endParaRPr/>
           </a:p>
         </p:txBody>
       </p:sp>
@@ -13410,6 +13455,7 @@
           <a:lstStyle/>
           <a:p>
             <a:pPr algn="ctr"/>
+            <a:endParaRPr/>
           </a:p>
         </p:txBody>
       </p:sp>
@@ -13523,6 +13569,7 @@
           <a:lstStyle/>
           <a:p>
             <a:pPr algn="ctr"/>
+            <a:endParaRPr/>
           </a:p>
         </p:txBody>
       </p:sp>
@@ -13603,6 +13650,7 @@
           <a:lstStyle/>
           <a:p>
             <a:pPr algn="ctr"/>
+            <a:endParaRPr/>
           </a:p>
         </p:txBody>
       </p:sp>
@@ -13716,6 +13764,7 @@
           <a:lstStyle/>
           <a:p>
             <a:pPr algn="ctr"/>
+            <a:endParaRPr/>
           </a:p>
         </p:txBody>
       </p:sp>
@@ -13796,6 +13845,7 @@
           <a:lstStyle/>
           <a:p>
             <a:pPr algn="ctr"/>
+            <a:endParaRPr/>
           </a:p>
         </p:txBody>
       </p:sp>
@@ -13909,6 +13959,7 @@
           <a:lstStyle/>
           <a:p>
             <a:pPr algn="ctr"/>
+            <a:endParaRPr/>
           </a:p>
         </p:txBody>
       </p:sp>
@@ -13958,7 +14009,7 @@
 </file>
 
 <file path=ppt/slides/slide5.xml><?xml version="1.0" encoding="utf-8"?>
-<p:sld xmlns:a="http://schemas.openxmlformats.org/drawingml/2006/main" xmlns:p="http://schemas.openxmlformats.org/presentationml/2006/main" xmlns:r="http://schemas.openxmlformats.org/officeDocument/2006/relationships">
+<p:sld xmlns:a="http://schemas.openxmlformats.org/drawingml/2006/main" xmlns:r="http://schemas.openxmlformats.org/officeDocument/2006/relationships" xmlns:p="http://schemas.openxmlformats.org/presentationml/2006/main">
   <p:cSld>
     <p:bg>
       <p:bgPr>
@@ -13974,7 +14025,14 @@
         <p:cNvGrpSpPr/>
         <p:nvPr/>
       </p:nvGrpSpPr>
-      <p:grpSpPr/>
+      <p:grpSpPr>
+        <a:xfrm>
+          <a:off x="0" y="0"/>
+          <a:ext cx="0" cy="0"/>
+          <a:chOff x="0" y="0"/>
+          <a:chExt cx="0" cy="0"/>
+        </a:xfrm>
+      </p:grpSpPr>
       <p:sp>
         <p:nvSpPr>
           <p:cNvPr id="2" name="Rectangle 1"/>
@@ -14015,6 +14073,7 @@
           <a:lstStyle/>
           <a:p>
             <a:pPr algn="ctr"/>
+            <a:endParaRPr/>
           </a:p>
         </p:txBody>
       </p:sp>
@@ -14058,6 +14117,7 @@
           <a:lstStyle/>
           <a:p>
             <a:pPr algn="ctr"/>
+            <a:endParaRPr/>
           </a:p>
         </p:txBody>
       </p:sp>
@@ -14206,6 +14266,7 @@
           <a:lstStyle/>
           <a:p>
             <a:pPr algn="ctr"/>
+            <a:endParaRPr/>
           </a:p>
         </p:txBody>
       </p:sp>
@@ -14249,6 +14310,7 @@
           <a:lstStyle/>
           <a:p>
             <a:pPr algn="ctr"/>
+            <a:endParaRPr/>
           </a:p>
         </p:txBody>
       </p:sp>
@@ -14362,6 +14424,7 @@
           <a:lstStyle/>
           <a:p>
             <a:pPr algn="ctr"/>
+            <a:endParaRPr/>
           </a:p>
         </p:txBody>
       </p:sp>
@@ -14479,6 +14542,7 @@
           <a:lstStyle/>
           <a:p>
             <a:pPr algn="ctr"/>
+            <a:endParaRPr/>
           </a:p>
         </p:txBody>
       </p:sp>
@@ -14522,6 +14586,7 @@
           <a:lstStyle/>
           <a:p>
             <a:pPr algn="ctr"/>
+            <a:endParaRPr/>
           </a:p>
         </p:txBody>
       </p:sp>
@@ -14635,6 +14700,7 @@
           <a:lstStyle/>
           <a:p>
             <a:pPr algn="ctr"/>
+            <a:endParaRPr/>
           </a:p>
         </p:txBody>
       </p:sp>
@@ -14752,6 +14818,7 @@
           <a:lstStyle/>
           <a:p>
             <a:pPr algn="ctr"/>
+            <a:endParaRPr/>
           </a:p>
         </p:txBody>
       </p:sp>
@@ -14795,6 +14862,7 @@
           <a:lstStyle/>
           <a:p>
             <a:pPr algn="ctr"/>
+            <a:endParaRPr/>
           </a:p>
         </p:txBody>
       </p:sp>
@@ -14908,6 +14976,7 @@
           <a:lstStyle/>
           <a:p>
             <a:pPr algn="ctr"/>
+            <a:endParaRPr/>
           </a:p>
         </p:txBody>
       </p:sp>
@@ -15025,6 +15094,7 @@
           <a:lstStyle/>
           <a:p>
             <a:pPr algn="ctr"/>
+            <a:endParaRPr/>
           </a:p>
         </p:txBody>
       </p:sp>
@@ -15068,6 +15138,7 @@
           <a:lstStyle/>
           <a:p>
             <a:pPr algn="ctr"/>
+            <a:endParaRPr/>
           </a:p>
         </p:txBody>
       </p:sp>
@@ -15181,6 +15252,7 @@
           <a:lstStyle/>
           <a:p>
             <a:pPr algn="ctr"/>
+            <a:endParaRPr/>
           </a:p>
         </p:txBody>
       </p:sp>
@@ -15298,6 +15370,7 @@
           <a:lstStyle/>
           <a:p>
             <a:pPr algn="ctr"/>
+            <a:endParaRPr/>
           </a:p>
         </p:txBody>
       </p:sp>
@@ -15341,6 +15414,7 @@
           <a:lstStyle/>
           <a:p>
             <a:pPr algn="ctr"/>
+            <a:endParaRPr/>
           </a:p>
         </p:txBody>
       </p:sp>
@@ -15454,6 +15528,7 @@
           <a:lstStyle/>
           <a:p>
             <a:pPr algn="ctr"/>
+            <a:endParaRPr/>
           </a:p>
         </p:txBody>
       </p:sp>
@@ -15569,6 +15644,7 @@
           <a:lstStyle/>
           <a:p>
             <a:pPr algn="ctr"/>
+            <a:endParaRPr/>
           </a:p>
         </p:txBody>
       </p:sp>
@@ -15612,6 +15688,7 @@
           <a:lstStyle/>
           <a:p>
             <a:pPr algn="ctr"/>
+            <a:endParaRPr/>
           </a:p>
         </p:txBody>
       </p:sp>
@@ -15725,6 +15802,7 @@
           <a:lstStyle/>
           <a:p>
             <a:pPr algn="ctr"/>
+            <a:endParaRPr/>
           </a:p>
         </p:txBody>
       </p:sp>
@@ -15774,7 +15852,7 @@
 </file>
 
 <file path=ppt/slides/slide6.xml><?xml version="1.0" encoding="utf-8"?>
-<p:sld xmlns:a="http://schemas.openxmlformats.org/drawingml/2006/main" xmlns:p="http://schemas.openxmlformats.org/presentationml/2006/main" xmlns:r="http://schemas.openxmlformats.org/officeDocument/2006/relationships">
+<p:sld xmlns:a="http://schemas.openxmlformats.org/drawingml/2006/main" xmlns:r="http://schemas.openxmlformats.org/officeDocument/2006/relationships" xmlns:p="http://schemas.openxmlformats.org/presentationml/2006/main">
   <p:cSld>
     <p:bg>
       <p:bgPr>
@@ -15790,7 +15868,14 @@
         <p:cNvGrpSpPr/>
         <p:nvPr/>
       </p:nvGrpSpPr>
-      <p:grpSpPr/>
+      <p:grpSpPr>
+        <a:xfrm>
+          <a:off x="0" y="0"/>
+          <a:ext cx="0" cy="0"/>
+          <a:chOff x="0" y="0"/>
+          <a:chExt cx="0" cy="0"/>
+        </a:xfrm>
+      </p:grpSpPr>
       <p:sp>
         <p:nvSpPr>
           <p:cNvPr id="2" name="Rectangle 1"/>
@@ -15831,6 +15916,7 @@
           <a:lstStyle/>
           <a:p>
             <a:pPr algn="ctr"/>
+            <a:endParaRPr/>
           </a:p>
         </p:txBody>
       </p:sp>
@@ -15874,6 +15960,7 @@
           <a:lstStyle/>
           <a:p>
             <a:pPr algn="ctr"/>
+            <a:endParaRPr/>
           </a:p>
         </p:txBody>
       </p:sp>
@@ -16024,6 +16111,7 @@
           <a:lstStyle/>
           <a:p>
             <a:pPr algn="ctr"/>
+            <a:endParaRPr/>
           </a:p>
         </p:txBody>
       </p:sp>
@@ -16067,6 +16155,7 @@
           <a:lstStyle/>
           <a:p>
             <a:pPr algn="ctr"/>
+            <a:endParaRPr/>
           </a:p>
         </p:txBody>
       </p:sp>
@@ -16180,6 +16269,7 @@
           <a:lstStyle/>
           <a:p>
             <a:pPr algn="ctr"/>
+            <a:endParaRPr/>
           </a:p>
         </p:txBody>
       </p:sp>
@@ -16294,6 +16384,7 @@
           <a:lstStyle/>
           <a:p>
             <a:pPr algn="ctr"/>
+            <a:endParaRPr/>
           </a:p>
         </p:txBody>
       </p:sp>
@@ -16337,6 +16428,7 @@
           <a:lstStyle/>
           <a:p>
             <a:pPr algn="ctr"/>
+            <a:endParaRPr/>
           </a:p>
         </p:txBody>
       </p:sp>
@@ -16450,6 +16542,7 @@
           <a:lstStyle/>
           <a:p>
             <a:pPr algn="ctr"/>
+            <a:endParaRPr/>
           </a:p>
         </p:txBody>
       </p:sp>
@@ -16566,6 +16659,7 @@
           <a:lstStyle/>
           <a:p>
             <a:pPr algn="ctr"/>
+            <a:endParaRPr/>
           </a:p>
         </p:txBody>
       </p:sp>
@@ -16609,6 +16703,7 @@
           <a:lstStyle/>
           <a:p>
             <a:pPr algn="ctr"/>
+            <a:endParaRPr/>
           </a:p>
         </p:txBody>
       </p:sp>
@@ -16722,6 +16817,7 @@
           <a:lstStyle/>
           <a:p>
             <a:pPr algn="ctr"/>
+            <a:endParaRPr/>
           </a:p>
         </p:txBody>
       </p:sp>
@@ -16836,6 +16932,7 @@
           <a:lstStyle/>
           <a:p>
             <a:pPr algn="ctr"/>
+            <a:endParaRPr/>
           </a:p>
         </p:txBody>
       </p:sp>
@@ -16879,6 +16976,7 @@
           <a:lstStyle/>
           <a:p>
             <a:pPr algn="ctr"/>
+            <a:endParaRPr/>
           </a:p>
         </p:txBody>
       </p:sp>
@@ -16992,6 +17090,7 @@
           <a:lstStyle/>
           <a:p>
             <a:pPr algn="ctr"/>
+            <a:endParaRPr/>
           </a:p>
         </p:txBody>
       </p:sp>
@@ -17108,6 +17207,7 @@
           <a:lstStyle/>
           <a:p>
             <a:pPr algn="ctr"/>
+            <a:endParaRPr/>
           </a:p>
         </p:txBody>
       </p:sp>
@@ -17151,6 +17251,7 @@
           <a:lstStyle/>
           <a:p>
             <a:pPr algn="ctr"/>
+            <a:endParaRPr/>
           </a:p>
         </p:txBody>
       </p:sp>
@@ -17264,6 +17365,7 @@
           <a:lstStyle/>
           <a:p>
             <a:pPr algn="ctr"/>
+            <a:endParaRPr/>
           </a:p>
         </p:txBody>
       </p:sp>
@@ -17380,6 +17482,7 @@
           <a:lstStyle/>
           <a:p>
             <a:pPr algn="ctr"/>
+            <a:endParaRPr/>
           </a:p>
         </p:txBody>
       </p:sp>
@@ -17423,6 +17526,7 @@
           <a:lstStyle/>
           <a:p>
             <a:pPr algn="ctr"/>
+            <a:endParaRPr/>
           </a:p>
         </p:txBody>
       </p:sp>
@@ -17536,6 +17640,7 @@
           <a:lstStyle/>
           <a:p>
             <a:pPr algn="ctr"/>
+            <a:endParaRPr/>
           </a:p>
         </p:txBody>
       </p:sp>
@@ -17651,6 +17756,7 @@
           <a:lstStyle/>
           <a:p>
             <a:pPr algn="ctr"/>
+            <a:endParaRPr/>
           </a:p>
         </p:txBody>
       </p:sp>
@@ -17694,6 +17800,7 @@
           <a:lstStyle/>
           <a:p>
             <a:pPr algn="ctr"/>
+            <a:endParaRPr/>
           </a:p>
         </p:txBody>
       </p:sp>
@@ -17807,6 +17914,7 @@
           <a:lstStyle/>
           <a:p>
             <a:pPr algn="ctr"/>
+            <a:endParaRPr/>
           </a:p>
         </p:txBody>
       </p:sp>
@@ -17887,6 +17995,7 @@
           <a:lstStyle/>
           <a:p>
             <a:pPr algn="ctr"/>
+            <a:endParaRPr/>
           </a:p>
         </p:txBody>
       </p:sp>
@@ -17934,7 +18043,7 @@
 </file>
 
 <file path=ppt/slides/slide7.xml><?xml version="1.0" encoding="utf-8"?>
-<p:sld xmlns:a="http://schemas.openxmlformats.org/drawingml/2006/main" xmlns:p="http://schemas.openxmlformats.org/presentationml/2006/main" xmlns:r="http://schemas.openxmlformats.org/officeDocument/2006/relationships">
+<p:sld xmlns:a="http://schemas.openxmlformats.org/drawingml/2006/main" xmlns:r="http://schemas.openxmlformats.org/officeDocument/2006/relationships" xmlns:p="http://schemas.openxmlformats.org/presentationml/2006/main">
   <p:cSld>
     <p:bg>
       <p:bgPr>
@@ -17950,7 +18059,14 @@
         <p:cNvGrpSpPr/>
         <p:nvPr/>
       </p:nvGrpSpPr>
-      <p:grpSpPr/>
+      <p:grpSpPr>
+        <a:xfrm>
+          <a:off x="0" y="0"/>
+          <a:ext cx="0" cy="0"/>
+          <a:chOff x="0" y="0"/>
+          <a:chExt cx="0" cy="0"/>
+        </a:xfrm>
+      </p:grpSpPr>
       <p:sp>
         <p:nvSpPr>
           <p:cNvPr id="2" name="Rectangle 1"/>
@@ -17991,6 +18107,7 @@
           <a:lstStyle/>
           <a:p>
             <a:pPr algn="ctr"/>
+            <a:endParaRPr/>
           </a:p>
         </p:txBody>
       </p:sp>
@@ -18034,6 +18151,7 @@
           <a:lstStyle/>
           <a:p>
             <a:pPr algn="ctr"/>
+            <a:endParaRPr/>
           </a:p>
         </p:txBody>
       </p:sp>
@@ -18147,6 +18265,7 @@
           <a:lstStyle/>
           <a:p>
             <a:pPr algn="ctr"/>
+            <a:endParaRPr/>
           </a:p>
         </p:txBody>
       </p:sp>
@@ -18225,6 +18344,7 @@
           <a:lstStyle/>
           <a:p>
             <a:pPr algn="ctr"/>
+            <a:endParaRPr/>
           </a:p>
         </p:txBody>
       </p:sp>
@@ -18303,6 +18423,7 @@
           <a:lstStyle/>
           <a:p>
             <a:pPr algn="ctr"/>
+            <a:endParaRPr/>
           </a:p>
         </p:txBody>
       </p:sp>
@@ -18381,6 +18502,7 @@
           <a:lstStyle/>
           <a:p>
             <a:pPr algn="ctr"/>
+            <a:endParaRPr/>
           </a:p>
         </p:txBody>
       </p:sp>
@@ -18459,6 +18581,7 @@
           <a:lstStyle/>
           <a:p>
             <a:pPr algn="ctr"/>
+            <a:endParaRPr/>
           </a:p>
         </p:txBody>
       </p:sp>
@@ -18537,6 +18660,7 @@
           <a:lstStyle/>
           <a:p>
             <a:pPr algn="ctr"/>
+            <a:endParaRPr/>
           </a:p>
         </p:txBody>
       </p:sp>
@@ -18615,6 +18739,7 @@
           <a:lstStyle/>
           <a:p>
             <a:pPr algn="ctr"/>
+            <a:endParaRPr/>
           </a:p>
         </p:txBody>
       </p:sp>
@@ -18658,6 +18783,7 @@
           <a:lstStyle/>
           <a:p>
             <a:pPr algn="ctr"/>
+            <a:endParaRPr/>
           </a:p>
         </p:txBody>
       </p:sp>
@@ -18736,6 +18862,7 @@
           <a:lstStyle/>
           <a:p>
             <a:pPr algn="ctr"/>
+            <a:endParaRPr/>
           </a:p>
         </p:txBody>
       </p:sp>
@@ -18814,6 +18941,7 @@
           <a:lstStyle/>
           <a:p>
             <a:pPr algn="ctr"/>
+            <a:endParaRPr/>
           </a:p>
         </p:txBody>
       </p:sp>
@@ -18892,6 +19020,7 @@
           <a:lstStyle/>
           <a:p>
             <a:pPr algn="ctr"/>
+            <a:endParaRPr/>
           </a:p>
         </p:txBody>
       </p:sp>
@@ -18935,6 +19064,7 @@
           <a:lstStyle/>
           <a:p>
             <a:pPr algn="ctr"/>
+            <a:endParaRPr/>
           </a:p>
         </p:txBody>
       </p:sp>
@@ -19013,6 +19143,7 @@
           <a:lstStyle/>
           <a:p>
             <a:pPr algn="ctr"/>
+            <a:endParaRPr/>
           </a:p>
         </p:txBody>
       </p:sp>
@@ -19091,6 +19222,7 @@
           <a:lstStyle/>
           <a:p>
             <a:pPr algn="ctr"/>
+            <a:endParaRPr/>
           </a:p>
         </p:txBody>
       </p:sp>
@@ -19169,6 +19301,7 @@
           <a:lstStyle/>
           <a:p>
             <a:pPr algn="ctr"/>
+            <a:endParaRPr/>
           </a:p>
         </p:txBody>
       </p:sp>
@@ -19212,6 +19345,7 @@
           <a:lstStyle/>
           <a:p>
             <a:pPr algn="ctr"/>
+            <a:endParaRPr/>
           </a:p>
         </p:txBody>
       </p:sp>
@@ -19290,6 +19424,7 @@
           <a:lstStyle/>
           <a:p>
             <a:pPr algn="ctr"/>
+            <a:endParaRPr/>
           </a:p>
         </p:txBody>
       </p:sp>
@@ -19368,6 +19503,7 @@
           <a:lstStyle/>
           <a:p>
             <a:pPr algn="ctr"/>
+            <a:endParaRPr/>
           </a:p>
         </p:txBody>
       </p:sp>
@@ -19446,6 +19582,7 @@
           <a:lstStyle/>
           <a:p>
             <a:pPr algn="ctr"/>
+            <a:endParaRPr/>
           </a:p>
         </p:txBody>
       </p:sp>
@@ -19489,6 +19626,7 @@
           <a:lstStyle/>
           <a:p>
             <a:pPr algn="ctr"/>
+            <a:endParaRPr/>
           </a:p>
         </p:txBody>
       </p:sp>
@@ -19567,6 +19705,7 @@
           <a:lstStyle/>
           <a:p>
             <a:pPr algn="ctr"/>
+            <a:endParaRPr/>
           </a:p>
         </p:txBody>
       </p:sp>
@@ -19645,6 +19784,7 @@
           <a:lstStyle/>
           <a:p>
             <a:pPr algn="ctr"/>
+            <a:endParaRPr/>
           </a:p>
         </p:txBody>
       </p:sp>
@@ -19723,6 +19863,7 @@
           <a:lstStyle/>
           <a:p>
             <a:pPr algn="ctr"/>
+            <a:endParaRPr/>
           </a:p>
         </p:txBody>
       </p:sp>
@@ -19766,6 +19907,7 @@
           <a:lstStyle/>
           <a:p>
             <a:pPr algn="ctr"/>
+            <a:endParaRPr/>
           </a:p>
         </p:txBody>
       </p:sp>
@@ -19844,6 +19986,7 @@
           <a:lstStyle/>
           <a:p>
             <a:pPr algn="ctr"/>
+            <a:endParaRPr/>
           </a:p>
         </p:txBody>
       </p:sp>
@@ -19922,6 +20065,7 @@
           <a:lstStyle/>
           <a:p>
             <a:pPr algn="ctr"/>
+            <a:endParaRPr/>
           </a:p>
         </p:txBody>
       </p:sp>
@@ -20000,6 +20144,7 @@
           <a:lstStyle/>
           <a:p>
             <a:pPr algn="ctr"/>
+            <a:endParaRPr/>
           </a:p>
         </p:txBody>
       </p:sp>
@@ -20043,6 +20188,7 @@
           <a:lstStyle/>
           <a:p>
             <a:pPr algn="ctr"/>
+            <a:endParaRPr/>
           </a:p>
         </p:txBody>
       </p:sp>
@@ -20121,6 +20267,7 @@
           <a:lstStyle/>
           <a:p>
             <a:pPr algn="ctr"/>
+            <a:endParaRPr/>
           </a:p>
         </p:txBody>
       </p:sp>
@@ -20199,6 +20346,7 @@
           <a:lstStyle/>
           <a:p>
             <a:pPr algn="ctr"/>
+            <a:endParaRPr/>
           </a:p>
         </p:txBody>
       </p:sp>
@@ -20277,6 +20425,7 @@
           <a:lstStyle/>
           <a:p>
             <a:pPr algn="ctr"/>
+            <a:endParaRPr/>
           </a:p>
         </p:txBody>
       </p:sp>
@@ -20320,6 +20469,7 @@
           <a:lstStyle/>
           <a:p>
             <a:pPr algn="ctr"/>
+            <a:endParaRPr/>
           </a:p>
         </p:txBody>
       </p:sp>
@@ -20398,6 +20548,7 @@
           <a:lstStyle/>
           <a:p>
             <a:pPr algn="ctr"/>
+            <a:endParaRPr/>
           </a:p>
         </p:txBody>
       </p:sp>
@@ -20476,6 +20627,7 @@
           <a:lstStyle/>
           <a:p>
             <a:pPr algn="ctr"/>
+            <a:endParaRPr/>
           </a:p>
         </p:txBody>
       </p:sp>
@@ -20554,6 +20706,7 @@
           <a:lstStyle/>
           <a:p>
             <a:pPr algn="ctr"/>
+            <a:endParaRPr/>
           </a:p>
         </p:txBody>
       </p:sp>
@@ -20566,7 +20719,7 @@
 </file>
 
 <file path=ppt/slides/slide8.xml><?xml version="1.0" encoding="utf-8"?>
-<p:sld xmlns:a="http://schemas.openxmlformats.org/drawingml/2006/main" xmlns:p="http://schemas.openxmlformats.org/presentationml/2006/main" xmlns:r="http://schemas.openxmlformats.org/officeDocument/2006/relationships">
+<p:sld xmlns:a="http://schemas.openxmlformats.org/drawingml/2006/main" xmlns:r="http://schemas.openxmlformats.org/officeDocument/2006/relationships" xmlns:p="http://schemas.openxmlformats.org/presentationml/2006/main">
   <p:cSld>
     <p:bg>
       <p:bgPr>
@@ -20582,7 +20735,14 @@
         <p:cNvGrpSpPr/>
         <p:nvPr/>
       </p:nvGrpSpPr>
-      <p:grpSpPr/>
+      <p:grpSpPr>
+        <a:xfrm>
+          <a:off x="0" y="0"/>
+          <a:ext cx="0" cy="0"/>
+          <a:chOff x="0" y="0"/>
+          <a:chExt cx="0" cy="0"/>
+        </a:xfrm>
+      </p:grpSpPr>
       <p:sp>
         <p:nvSpPr>
           <p:cNvPr id="2" name="Rectangle 1"/>
@@ -20623,6 +20783,7 @@
           <a:lstStyle/>
           <a:p>
             <a:pPr algn="ctr"/>
+            <a:endParaRPr/>
           </a:p>
         </p:txBody>
       </p:sp>
@@ -20666,6 +20827,7 @@
           <a:lstStyle/>
           <a:p>
             <a:pPr algn="ctr"/>
+            <a:endParaRPr/>
           </a:p>
         </p:txBody>
       </p:sp>
@@ -20781,6 +20943,7 @@
           <a:lstStyle/>
           <a:p>
             <a:pPr algn="ctr"/>
+            <a:endParaRPr/>
           </a:p>
         </p:txBody>
       </p:sp>
@@ -20824,6 +20987,7 @@
           <a:lstStyle/>
           <a:p>
             <a:pPr algn="ctr"/>
+            <a:endParaRPr/>
           </a:p>
         </p:txBody>
       </p:sp>
@@ -20937,6 +21101,7 @@
           <a:lstStyle/>
           <a:p>
             <a:pPr algn="ctr"/>
+            <a:endParaRPr/>
           </a:p>
         </p:txBody>
       </p:sp>
@@ -21018,6 +21183,7 @@
           <a:lstStyle/>
           <a:p>
             <a:pPr algn="ctr"/>
+            <a:endParaRPr/>
           </a:p>
         </p:txBody>
       </p:sp>
@@ -21061,6 +21227,7 @@
           <a:lstStyle/>
           <a:p>
             <a:pPr algn="ctr"/>
+            <a:endParaRPr/>
           </a:p>
         </p:txBody>
       </p:sp>
@@ -21174,6 +21341,7 @@
           <a:lstStyle/>
           <a:p>
             <a:pPr algn="ctr"/>
+            <a:endParaRPr/>
           </a:p>
         </p:txBody>
       </p:sp>
@@ -21255,6 +21423,7 @@
           <a:lstStyle/>
           <a:p>
             <a:pPr algn="ctr"/>
+            <a:endParaRPr/>
           </a:p>
         </p:txBody>
       </p:sp>
@@ -21298,6 +21467,7 @@
           <a:lstStyle/>
           <a:p>
             <a:pPr algn="ctr"/>
+            <a:endParaRPr/>
           </a:p>
         </p:txBody>
       </p:sp>
@@ -21411,6 +21581,7 @@
           <a:lstStyle/>
           <a:p>
             <a:pPr algn="ctr"/>
+            <a:endParaRPr/>
           </a:p>
         </p:txBody>
       </p:sp>
@@ -21492,6 +21663,7 @@
           <a:lstStyle/>
           <a:p>
             <a:pPr algn="ctr"/>
+            <a:endParaRPr/>
           </a:p>
         </p:txBody>
       </p:sp>
@@ -21535,6 +21707,7 @@
           <a:lstStyle/>
           <a:p>
             <a:pPr algn="ctr"/>
+            <a:endParaRPr/>
           </a:p>
         </p:txBody>
       </p:sp>
@@ -21648,6 +21821,7 @@
           <a:lstStyle/>
           <a:p>
             <a:pPr algn="ctr"/>
+            <a:endParaRPr/>
           </a:p>
         </p:txBody>
       </p:sp>
@@ -21729,6 +21903,7 @@
           <a:lstStyle/>
           <a:p>
             <a:pPr algn="ctr"/>
+            <a:endParaRPr/>
           </a:p>
         </p:txBody>
       </p:sp>
@@ -21772,6 +21947,7 @@
           <a:lstStyle/>
           <a:p>
             <a:pPr algn="ctr"/>
+            <a:endParaRPr/>
           </a:p>
         </p:txBody>
       </p:sp>
@@ -21885,6 +22061,7 @@
           <a:lstStyle/>
           <a:p>
             <a:pPr algn="ctr"/>
+            <a:endParaRPr/>
           </a:p>
         </p:txBody>
       </p:sp>
@@ -21966,6 +22143,7 @@
           <a:lstStyle/>
           <a:p>
             <a:pPr algn="ctr"/>
+            <a:endParaRPr/>
           </a:p>
         </p:txBody>
       </p:sp>
@@ -22009,6 +22187,7 @@
           <a:lstStyle/>
           <a:p>
             <a:pPr algn="ctr"/>
+            <a:endParaRPr/>
           </a:p>
         </p:txBody>
       </p:sp>
@@ -22122,6 +22301,7 @@
           <a:lstStyle/>
           <a:p>
             <a:pPr algn="ctr"/>
+            <a:endParaRPr/>
           </a:p>
         </p:txBody>
       </p:sp>
@@ -22203,6 +22383,7 @@
           <a:lstStyle/>
           <a:p>
             <a:pPr algn="ctr"/>
+            <a:endParaRPr/>
           </a:p>
         </p:txBody>
       </p:sp>
@@ -22246,6 +22427,7 @@
           <a:lstStyle/>
           <a:p>
             <a:pPr algn="ctr"/>
+            <a:endParaRPr/>
           </a:p>
         </p:txBody>
       </p:sp>
@@ -22359,6 +22541,7 @@
           <a:lstStyle/>
           <a:p>
             <a:pPr algn="ctr"/>
+            <a:endParaRPr/>
           </a:p>
         </p:txBody>
       </p:sp>
@@ -22440,6 +22623,7 @@
           <a:lstStyle/>
           <a:p>
             <a:pPr algn="ctr"/>
+            <a:endParaRPr/>
           </a:p>
         </p:txBody>
       </p:sp>
@@ -22483,6 +22667,7 @@
           <a:lstStyle/>
           <a:p>
             <a:pPr algn="ctr"/>
+            <a:endParaRPr/>
           </a:p>
         </p:txBody>
       </p:sp>
@@ -22596,6 +22781,7 @@
           <a:lstStyle/>
           <a:p>
             <a:pPr algn="ctr"/>
+            <a:endParaRPr/>
           </a:p>
         </p:txBody>
       </p:sp>
@@ -22644,7 +22830,7 @@
 </file>
 
 <file path=ppt/slides/slide9.xml><?xml version="1.0" encoding="utf-8"?>
-<p:sld xmlns:a="http://schemas.openxmlformats.org/drawingml/2006/main" xmlns:p="http://schemas.openxmlformats.org/presentationml/2006/main" xmlns:r="http://schemas.openxmlformats.org/officeDocument/2006/relationships">
+<p:sld xmlns:a="http://schemas.openxmlformats.org/drawingml/2006/main" xmlns:r="http://schemas.openxmlformats.org/officeDocument/2006/relationships" xmlns:p="http://schemas.openxmlformats.org/presentationml/2006/main">
   <p:cSld>
     <p:bg>
       <p:bgPr>
@@ -22660,7 +22846,14 @@
         <p:cNvGrpSpPr/>
         <p:nvPr/>
       </p:nvGrpSpPr>
-      <p:grpSpPr/>
+      <p:grpSpPr>
+        <a:xfrm>
+          <a:off x="0" y="0"/>
+          <a:ext cx="0" cy="0"/>
+          <a:chOff x="0" y="0"/>
+          <a:chExt cx="0" cy="0"/>
+        </a:xfrm>
+      </p:grpSpPr>
       <p:sp>
         <p:nvSpPr>
           <p:cNvPr id="2" name="Rectangle 1"/>
@@ -22701,6 +22894,7 @@
           <a:lstStyle/>
           <a:p>
             <a:pPr algn="ctr"/>
+            <a:endParaRPr/>
           </a:p>
         </p:txBody>
       </p:sp>
@@ -22744,6 +22938,7 @@
           <a:lstStyle/>
           <a:p>
             <a:pPr algn="ctr"/>
+            <a:endParaRPr/>
           </a:p>
         </p:txBody>
       </p:sp>
@@ -22859,6 +23054,7 @@
           <a:lstStyle/>
           <a:p>
             <a:pPr algn="ctr"/>
+            <a:endParaRPr/>
           </a:p>
         </p:txBody>
       </p:sp>
@@ -22902,6 +23098,7 @@
           <a:lstStyle/>
           <a:p>
             <a:pPr algn="ctr"/>
+            <a:endParaRPr/>
           </a:p>
         </p:txBody>
       </p:sp>
@@ -23015,6 +23212,7 @@
           <a:lstStyle/>
           <a:p>
             <a:pPr algn="ctr"/>
+            <a:endParaRPr/>
           </a:p>
         </p:txBody>
       </p:sp>
@@ -23096,6 +23294,7 @@
           <a:lstStyle/>
           <a:p>
             <a:pPr algn="ctr"/>
+            <a:endParaRPr/>
           </a:p>
         </p:txBody>
       </p:sp>
@@ -23139,6 +23338,7 @@
           <a:lstStyle/>
           <a:p>
             <a:pPr algn="ctr"/>
+            <a:endParaRPr/>
           </a:p>
         </p:txBody>
       </p:sp>
@@ -23252,6 +23452,7 @@
           <a:lstStyle/>
           <a:p>
             <a:pPr algn="ctr"/>
+            <a:endParaRPr/>
           </a:p>
         </p:txBody>
       </p:sp>
@@ -23333,6 +23534,7 @@
           <a:lstStyle/>
           <a:p>
             <a:pPr algn="ctr"/>
+            <a:endParaRPr/>
           </a:p>
         </p:txBody>
       </p:sp>
@@ -23376,6 +23578,7 @@
           <a:lstStyle/>
           <a:p>
             <a:pPr algn="ctr"/>
+            <a:endParaRPr/>
           </a:p>
         </p:txBody>
       </p:sp>
@@ -23489,6 +23692,7 @@
           <a:lstStyle/>
           <a:p>
             <a:pPr algn="ctr"/>
+            <a:endParaRPr/>
           </a:p>
         </p:txBody>
       </p:sp>
@@ -23570,6 +23774,7 @@
           <a:lstStyle/>
           <a:p>
             <a:pPr algn="ctr"/>
+            <a:endParaRPr/>
           </a:p>
         </p:txBody>
       </p:sp>
@@ -23613,6 +23818,7 @@
           <a:lstStyle/>
           <a:p>
             <a:pPr algn="ctr"/>
+            <a:endParaRPr/>
           </a:p>
         </p:txBody>
       </p:sp>
@@ -23726,6 +23932,7 @@
           <a:lstStyle/>
           <a:p>
             <a:pPr algn="ctr"/>
+            <a:endParaRPr/>
           </a:p>
         </p:txBody>
       </p:sp>
@@ -23807,6 +24014,7 @@
           <a:lstStyle/>
           <a:p>
             <a:pPr algn="ctr"/>
+            <a:endParaRPr/>
           </a:p>
         </p:txBody>
       </p:sp>
@@ -23850,6 +24058,7 @@
           <a:lstStyle/>
           <a:p>
             <a:pPr algn="ctr"/>
+            <a:endParaRPr/>
           </a:p>
         </p:txBody>
       </p:sp>
@@ -23963,6 +24172,7 @@
           <a:lstStyle/>
           <a:p>
             <a:pPr algn="ctr"/>
+            <a:endParaRPr/>
           </a:p>
         </p:txBody>
       </p:sp>
@@ -24044,6 +24254,7 @@
           <a:lstStyle/>
           <a:p>
             <a:pPr algn="ctr"/>
+            <a:endParaRPr/>
           </a:p>
         </p:txBody>
       </p:sp>
@@ -24087,6 +24298,7 @@
           <a:lstStyle/>
           <a:p>
             <a:pPr algn="ctr"/>
+            <a:endParaRPr/>
           </a:p>
         </p:txBody>
       </p:sp>
@@ -24200,6 +24412,7 @@
           <a:lstStyle/>
           <a:p>
             <a:pPr algn="ctr"/>
+            <a:endParaRPr/>
           </a:p>
         </p:txBody>
       </p:sp>
@@ -24281,6 +24494,7 @@
           <a:lstStyle/>
           <a:p>
             <a:pPr algn="ctr"/>
+            <a:endParaRPr/>
           </a:p>
         </p:txBody>
       </p:sp>
@@ -24324,6 +24538,7 @@
           <a:lstStyle/>
           <a:p>
             <a:pPr algn="ctr"/>
+            <a:endParaRPr/>
           </a:p>
         </p:txBody>
       </p:sp>
@@ -24437,6 +24652,7 @@
           <a:lstStyle/>
           <a:p>
             <a:pPr algn="ctr"/>
+            <a:endParaRPr/>
           </a:p>
         </p:txBody>
       </p:sp>
@@ -24518,6 +24734,7 @@
           <a:lstStyle/>
           <a:p>
             <a:pPr algn="ctr"/>
+            <a:endParaRPr/>
           </a:p>
         </p:txBody>
       </p:sp>
@@ -24561,6 +24778,7 @@
           <a:lstStyle/>
           <a:p>
             <a:pPr algn="ctr"/>
+            <a:endParaRPr/>
           </a:p>
         </p:txBody>
       </p:sp>
@@ -24674,6 +24892,7 @@
           <a:lstStyle/>
           <a:p>
             <a:pPr algn="ctr"/>
+            <a:endParaRPr/>
           </a:p>
         </p:txBody>
       </p:sp>
@@ -25052,44 +25271,44 @@
         <a:sysClr val="window" lastClr="FFFFFF"/>
       </a:lt1>
       <a:dk2>
-        <a:srgbClr val="1F497D"/>
+        <a:srgbClr val="0E2841"/>
       </a:dk2>
       <a:lt2>
-        <a:srgbClr val="EEECE1"/>
+        <a:srgbClr val="E8E8E8"/>
       </a:lt2>
       <a:accent1>
-        <a:srgbClr val="4F81BD"/>
+        <a:srgbClr val="156082"/>
       </a:accent1>
       <a:accent2>
-        <a:srgbClr val="C0504D"/>
+        <a:srgbClr val="E97132"/>
       </a:accent2>
       <a:accent3>
-        <a:srgbClr val="9BBB59"/>
+        <a:srgbClr val="196B24"/>
       </a:accent3>
       <a:accent4>
-        <a:srgbClr val="8064A2"/>
+        <a:srgbClr val="0F9ED5"/>
       </a:accent4>
       <a:accent5>
-        <a:srgbClr val="4BACC6"/>
+        <a:srgbClr val="A02B93"/>
       </a:accent5>
       <a:accent6>
-        <a:srgbClr val="F79646"/>
+        <a:srgbClr val="4EA72E"/>
       </a:accent6>
       <a:hlink>
-        <a:srgbClr val="0000FF"/>
+        <a:srgbClr val="467886"/>
       </a:hlink>
       <a:folHlink>
-        <a:srgbClr val="800080"/>
+        <a:srgbClr val="96607D"/>
       </a:folHlink>
     </a:clrScheme>
     <a:fontScheme name="Office">
       <a:majorFont>
-        <a:latin typeface="Calibri"/>
+        <a:latin typeface="Aptos Display" panose="02110004020202020204"/>
         <a:ea typeface=""/>
         <a:cs typeface=""/>
-        <a:font script="Jpan" typeface="ＭＳ Ｐゴシック"/>
+        <a:font script="Jpan" typeface="游ゴシック Light"/>
         <a:font script="Hang" typeface="맑은 고딕"/>
-        <a:font script="Hans" typeface="宋体"/>
+        <a:font script="Hans" typeface="等线 Light"/>
         <a:font script="Hant" typeface="新細明體"/>
         <a:font script="Arab" typeface="Times New Roman"/>
         <a:font script="Hebr" typeface="Times New Roman"/>
@@ -25117,14 +25336,31 @@
         <a:font script="Viet" typeface="Times New Roman"/>
         <a:font script="Uigh" typeface="Microsoft Uighur"/>
         <a:font script="Geor" typeface="Sylfaen"/>
+        <a:font script="Armn" typeface="Arial"/>
+        <a:font script="Bugi" typeface="Leelawadee UI"/>
+        <a:font script="Bopo" typeface="Microsoft JhengHei"/>
+        <a:font script="Java" typeface="Javanese Text"/>
+        <a:font script="Lisu" typeface="Segoe UI"/>
+        <a:font script="Mymr" typeface="Myanmar Text"/>
+        <a:font script="Nkoo" typeface="Ebrima"/>
+        <a:font script="Olck" typeface="Nirmala UI"/>
+        <a:font script="Osma" typeface="Ebrima"/>
+        <a:font script="Phag" typeface="Phagspa"/>
+        <a:font script="Syrn" typeface="Estrangelo Edessa"/>
+        <a:font script="Syrj" typeface="Estrangelo Edessa"/>
+        <a:font script="Syre" typeface="Estrangelo Edessa"/>
+        <a:font script="Sora" typeface="Nirmala UI"/>
+        <a:font script="Tale" typeface="Microsoft Tai Le"/>
+        <a:font script="Talu" typeface="Microsoft New Tai Lue"/>
+        <a:font script="Tfng" typeface="Ebrima"/>
       </a:majorFont>
       <a:minorFont>
-        <a:latin typeface="Calibri"/>
+        <a:latin typeface="Aptos" panose="02110004020202020204"/>
         <a:ea typeface=""/>
         <a:cs typeface=""/>
-        <a:font script="Jpan" typeface="ＭＳ Ｐゴシック"/>
+        <a:font script="Jpan" typeface="游ゴシック"/>
         <a:font script="Hang" typeface="맑은 고딕"/>
-        <a:font script="Hans" typeface="宋体"/>
+        <a:font script="Hans" typeface="等线"/>
         <a:font script="Hant" typeface="新細明體"/>
         <a:font script="Arab" typeface="Arial"/>
         <a:font script="Hebr" typeface="Arial"/>
@@ -25152,6 +25388,23 @@
         <a:font script="Viet" typeface="Arial"/>
         <a:font script="Uigh" typeface="Microsoft Uighur"/>
         <a:font script="Geor" typeface="Sylfaen"/>
+        <a:font script="Armn" typeface="Arial"/>
+        <a:font script="Bugi" typeface="Leelawadee UI"/>
+        <a:font script="Bopo" typeface="Microsoft JhengHei"/>
+        <a:font script="Java" typeface="Javanese Text"/>
+        <a:font script="Lisu" typeface="Segoe UI"/>
+        <a:font script="Mymr" typeface="Myanmar Text"/>
+        <a:font script="Nkoo" typeface="Ebrima"/>
+        <a:font script="Olck" typeface="Nirmala UI"/>
+        <a:font script="Osma" typeface="Ebrima"/>
+        <a:font script="Phag" typeface="Phagspa"/>
+        <a:font script="Syrn" typeface="Estrangelo Edessa"/>
+        <a:font script="Syrj" typeface="Estrangelo Edessa"/>
+        <a:font script="Syre" typeface="Estrangelo Edessa"/>
+        <a:font script="Sora" typeface="Nirmala UI"/>
+        <a:font script="Tale" typeface="Microsoft Tai Le"/>
+        <a:font script="Talu" typeface="Microsoft New Tai Lue"/>
+        <a:font script="Tfng" typeface="Ebrima"/>
       </a:minorFont>
     </a:fontScheme>
     <a:fmtScheme name="Office">
@@ -25163,180 +25416,136 @@
           <a:gsLst>
             <a:gs pos="0">
               <a:schemeClr val="phClr">
-                <a:tint val="50000"/>
-                <a:satMod val="300000"/>
+                <a:lumMod val="110000"/>
+                <a:satMod val="105000"/>
+                <a:tint val="67000"/>
               </a:schemeClr>
             </a:gs>
-            <a:gs pos="35000">
+            <a:gs pos="50000">
               <a:schemeClr val="phClr">
-                <a:tint val="37000"/>
-                <a:satMod val="300000"/>
+                <a:lumMod val="105000"/>
+                <a:satMod val="103000"/>
+                <a:tint val="73000"/>
               </a:schemeClr>
             </a:gs>
             <a:gs pos="100000">
               <a:schemeClr val="phClr">
-                <a:tint val="15000"/>
-                <a:satMod val="350000"/>
+                <a:lumMod val="105000"/>
+                <a:satMod val="109000"/>
+                <a:tint val="81000"/>
               </a:schemeClr>
             </a:gs>
           </a:gsLst>
-          <a:lin ang="16200000" scaled="1"/>
+          <a:lin ang="5400000" scaled="0"/>
         </a:gradFill>
         <a:gradFill rotWithShape="1">
           <a:gsLst>
             <a:gs pos="0">
               <a:schemeClr val="phClr">
-                <a:tint val="100000"/>
+                <a:satMod val="103000"/>
+                <a:lumMod val="102000"/>
+                <a:tint val="94000"/>
+              </a:schemeClr>
+            </a:gs>
+            <a:gs pos="50000">
+              <a:schemeClr val="phClr">
+                <a:satMod val="110000"/>
+                <a:lumMod val="100000"/>
                 <a:shade val="100000"/>
-                <a:satMod val="130000"/>
               </a:schemeClr>
             </a:gs>
             <a:gs pos="100000">
               <a:schemeClr val="phClr">
-                <a:tint val="50000"/>
-                <a:shade val="100000"/>
-                <a:satMod val="350000"/>
+                <a:lumMod val="99000"/>
+                <a:satMod val="120000"/>
+                <a:shade val="78000"/>
               </a:schemeClr>
             </a:gs>
           </a:gsLst>
-          <a:lin ang="16200000" scaled="0"/>
+          <a:lin ang="5400000" scaled="0"/>
         </a:gradFill>
       </a:fillStyleLst>
       <a:lnStyleLst>
-        <a:ln w="9525" cap="flat" cmpd="sng" algn="ctr">
-          <a:solidFill>
-            <a:schemeClr val="phClr">
-              <a:shade val="95000"/>
-              <a:satMod val="105000"/>
-            </a:schemeClr>
+        <a:ln w="12700" cap="flat" cmpd="sng" algn="ctr">
+          <a:solidFill>
+            <a:schemeClr val="phClr"/>
           </a:solidFill>
           <a:prstDash val="solid"/>
+          <a:miter lim="800000"/>
+        </a:ln>
+        <a:ln w="19050" cap="flat" cmpd="sng" algn="ctr">
+          <a:solidFill>
+            <a:schemeClr val="phClr"/>
+          </a:solidFill>
+          <a:prstDash val="solid"/>
+          <a:miter lim="800000"/>
         </a:ln>
         <a:ln w="25400" cap="flat" cmpd="sng" algn="ctr">
           <a:solidFill>
             <a:schemeClr val="phClr"/>
           </a:solidFill>
           <a:prstDash val="solid"/>
-        </a:ln>
-        <a:ln w="38100" cap="flat" cmpd="sng" algn="ctr">
-          <a:solidFill>
-            <a:schemeClr val="phClr"/>
-          </a:solidFill>
-          <a:prstDash val="solid"/>
+          <a:miter lim="800000"/>
         </a:ln>
       </a:lnStyleLst>
       <a:effectStyleLst>
         <a:effectStyle>
+          <a:effectLst/>
+        </a:effectStyle>
+        <a:effectStyle>
+          <a:effectLst/>
+        </a:effectStyle>
+        <a:effectStyle>
           <a:effectLst>
-            <a:outerShdw blurRad="40000" dist="20000" dir="5400000" rotWithShape="0">
+            <a:outerShdw blurRad="57150" dist="19050" dir="5400000" algn="ctr" rotWithShape="0">
               <a:srgbClr val="000000">
-                <a:alpha val="38000"/>
+                <a:alpha val="63000"/>
               </a:srgbClr>
             </a:outerShdw>
           </a:effectLst>
-        </a:effectStyle>
-        <a:effectStyle>
-          <a:effectLst>
-            <a:outerShdw blurRad="40000" dist="23000" dir="5400000" rotWithShape="0">
-              <a:srgbClr val="000000">
-                <a:alpha val="35000"/>
-              </a:srgbClr>
-            </a:outerShdw>
-          </a:effectLst>
-        </a:effectStyle>
-        <a:effectStyle>
-          <a:effectLst>
-            <a:outerShdw blurRad="40000" dist="23000" dir="5400000" rotWithShape="0">
-              <a:srgbClr val="000000">
-                <a:alpha val="35000"/>
-              </a:srgbClr>
-            </a:outerShdw>
-          </a:effectLst>
-          <a:scene3d>
-            <a:camera prst="orthographicFront">
-              <a:rot lat="0" lon="0" rev="0"/>
-            </a:camera>
-            <a:lightRig rig="threePt" dir="t">
-              <a:rot lat="0" lon="0" rev="1200000"/>
-            </a:lightRig>
-          </a:scene3d>
-          <a:sp3d>
-            <a:bevelT w="63500" h="25400"/>
-          </a:sp3d>
         </a:effectStyle>
       </a:effectStyleLst>
       <a:bgFillStyleLst>
         <a:solidFill>
           <a:schemeClr val="phClr"/>
         </a:solidFill>
+        <a:solidFill>
+          <a:schemeClr val="phClr">
+            <a:tint val="95000"/>
+            <a:satMod val="170000"/>
+          </a:schemeClr>
+        </a:solidFill>
         <a:gradFill rotWithShape="1">
           <a:gsLst>
             <a:gs pos="0">
               <a:schemeClr val="phClr">
-                <a:tint val="40000"/>
-                <a:satMod val="350000"/>
+                <a:tint val="93000"/>
+                <a:satMod val="150000"/>
+                <a:shade val="98000"/>
+                <a:lumMod val="102000"/>
               </a:schemeClr>
             </a:gs>
-            <a:gs pos="40000">
+            <a:gs pos="50000">
               <a:schemeClr val="phClr">
-                <a:tint val="45000"/>
-                <a:shade val="99000"/>
-                <a:satMod val="350000"/>
+                <a:tint val="98000"/>
+                <a:satMod val="130000"/>
+                <a:shade val="90000"/>
+                <a:lumMod val="103000"/>
               </a:schemeClr>
             </a:gs>
             <a:gs pos="100000">
               <a:schemeClr val="phClr">
-                <a:shade val="20000"/>
-                <a:satMod val="255000"/>
+                <a:shade val="63000"/>
+                <a:satMod val="120000"/>
               </a:schemeClr>
             </a:gs>
           </a:gsLst>
-          <a:path path="circle">
-            <a:fillToRect l="50000" t="-80000" r="50000" b="180000"/>
-          </a:path>
-        </a:gradFill>
-        <a:gradFill rotWithShape="1">
-          <a:gsLst>
-            <a:gs pos="0">
-              <a:schemeClr val="phClr">
-                <a:tint val="80000"/>
-                <a:satMod val="300000"/>
-              </a:schemeClr>
-            </a:gs>
-            <a:gs pos="100000">
-              <a:schemeClr val="phClr">
-                <a:shade val="30000"/>
-                <a:satMod val="200000"/>
-              </a:schemeClr>
-            </a:gs>
-          </a:gsLst>
-          <a:path path="circle">
-            <a:fillToRect l="50000" t="50000" r="50000" b="50000"/>
-          </a:path>
+          <a:lin ang="5400000" scaled="0"/>
         </a:gradFill>
       </a:bgFillStyleLst>
     </a:fmtScheme>
   </a:themeElements>
   <a:objectDefaults>
-    <a:spDef>
-      <a:spPr/>
-      <a:bodyPr/>
-      <a:lstStyle/>
-      <a:style>
-        <a:lnRef idx="1">
-          <a:schemeClr val="accent1"/>
-        </a:lnRef>
-        <a:fillRef idx="3">
-          <a:schemeClr val="accent1"/>
-        </a:fillRef>
-        <a:effectRef idx="2">
-          <a:schemeClr val="accent1"/>
-        </a:effectRef>
-        <a:fontRef idx="minor">
-          <a:schemeClr val="lt1"/>
-        </a:fontRef>
-      </a:style>
-    </a:spDef>
     <a:lnDef>
       <a:spPr/>
       <a:bodyPr/>
@@ -25358,5 +25567,10 @@
     </a:lnDef>
   </a:objectDefaults>
   <a:extraClrSchemeLst/>
+  <a:extLst>
+    <a:ext uri="{05A4C25C-085E-4340-85A3-A5531E510DB2}">
+      <thm15:themeFamily xmlns:thm15="http://schemas.microsoft.com/office/thememl/2012/main" name="Office Theme" id="{2E142A2C-CD16-42D6-873A-C26D2A0506FA}" vid="{1BDDFF52-6CD6-40A5-AB3C-68EB2F1E4D0A}"/>
+    </a:ext>
+  </a:extLst>
 </a:theme>
 </file>